--- a/Day1/mean_vs_median.pptx
+++ b/Day1/mean_vs_median.pptx
@@ -5,32 +5,33 @@
     <p:sldMasterId id="2147483648" r:id="rId1"/>
   </p:sldMasterIdLst>
   <p:notesMasterIdLst>
-    <p:notesMasterId r:id="rId4"/>
+    <p:notesMasterId r:id="rId7"/>
   </p:notesMasterIdLst>
   <p:sldIdLst>
-    <p:sldId id="256" r:id="rId3"/>
-    <p:sldId id="257" r:id="rId5"/>
-    <p:sldId id="258" r:id="rId6"/>
-    <p:sldId id="259" r:id="rId7"/>
+    <p:sldId id="256" r:id="rId2"/>
+    <p:sldId id="257" r:id="rId3"/>
+    <p:sldId id="258" r:id="rId4"/>
+    <p:sldId id="259" r:id="rId5"/>
+    <p:sldId id="260" r:id="rId6"/>
   </p:sldIdLst>
-  <p:sldSz cx="9144000" cy="5143500"/>
+  <p:sldSz cx="9144000" cy="5143500" type="screen16x9"/>
   <p:notesSz cx="6858000" cy="9144000"/>
   <p:embeddedFontLst>
     <p:embeddedFont>
-      <p:font typeface="Space Grotesk"/>
-      <p:regular r:id="rId11"/>
+      <p:font typeface="Outfit" panose="020B0604020202020204" charset="0"/>
+      <p:regular r:id="rId8"/>
     </p:embeddedFont>
     <p:embeddedFont>
-      <p:font typeface="Outfit"/>
-      <p:regular r:id="rId12"/>
+      <p:font typeface="Outfit Medium" panose="020B0604020202020204" charset="0"/>
+      <p:regular r:id="rId9"/>
     </p:embeddedFont>
     <p:embeddedFont>
-      <p:font typeface="Space Grotesk Medium"/>
-      <p:regular r:id="rId13"/>
+      <p:font typeface="Space Grotesk" panose="020B0604020202020204" charset="0"/>
+      <p:regular r:id="rId10"/>
     </p:embeddedFont>
     <p:embeddedFont>
-      <p:font typeface="Outfit Medium"/>
-      <p:regular r:id="rId14"/>
+      <p:font typeface="Space Grotesk Medium" panose="020B0604020202020204" charset="0"/>
+      <p:regular r:id="rId11"/>
     </p:embeddedFont>
   </p:embeddedFontLst>
   <p:defaultTextStyle>
@@ -291,7 +292,7 @@
     </p:bg>
     <p:spTree>
       <p:nvGrpSpPr>
-        <p:cNvPr id="2" name="Shape 2"/>
+        <p:cNvPr id="1" name="Shape 2"/>
         <p:cNvGrpSpPr/>
         <p:nvPr/>
       </p:nvGrpSpPr>
@@ -306,7 +307,9 @@
       <p:sp>
         <p:nvSpPr>
           <p:cNvPr id="3" name="Google Shape;3;n"/>
-          <p:cNvSpPr/>
+          <p:cNvSpPr>
+            <a:spLocks noGrp="1" noRot="1" noChangeAspect="1"/>
+          </p:cNvSpPr>
           <p:nvPr>
             <p:ph type="sldImg" idx="2"/>
           </p:nvPr>
@@ -355,7 +358,9 @@
       <p:sp>
         <p:nvSpPr>
           <p:cNvPr id="4" name="Google Shape;4;n"/>
-          <p:cNvSpPr txBox="1"/>
+          <p:cNvSpPr txBox="1">
+            <a:spLocks noGrp="1"/>
+          </p:cNvSpPr>
           <p:nvPr>
             <p:ph type="body" idx="1"/>
           </p:nvPr>
@@ -478,7 +483,9 @@
               <a:defRPr sz="1100"/>
             </a:lvl9pPr>
           </a:lstStyle>
-          <a:p/>
+          <a:p>
+            <a:endParaRPr/>
+          </a:p>
         </p:txBody>
       </p:sp>
     </p:spTree>
@@ -717,11 +724,11 @@
 </file>
 
 <file path=ppt/notesSlides/notesSlide1.xml><?xml version="1.0" encoding="utf-8"?>
-<p:notes xmlns:a="http://schemas.openxmlformats.org/drawingml/2006/main" xmlns:r="http://schemas.openxmlformats.org/officeDocument/2006/relationships" xmlns:p="http://schemas.openxmlformats.org/presentationml/2006/main" showMasterPhAnim="0" showMasterSp="0">
+<p:notes xmlns:a="http://schemas.openxmlformats.org/drawingml/2006/main" xmlns:r="http://schemas.openxmlformats.org/officeDocument/2006/relationships" xmlns:p="http://schemas.openxmlformats.org/presentationml/2006/main" showMasterSp="0" showMasterPhAnim="0">
   <p:cSld>
     <p:spTree>
       <p:nvGrpSpPr>
-        <p:cNvPr id="51" name="Shape 51"/>
+        <p:cNvPr id="1" name="Shape 51"/>
         <p:cNvGrpSpPr/>
         <p:nvPr/>
       </p:nvGrpSpPr>
@@ -736,15 +743,17 @@
       <p:sp>
         <p:nvSpPr>
           <p:cNvPr id="52" name="Google Shape;52;g3f52c767a14_17_0:notes"/>
-          <p:cNvSpPr/>
+          <p:cNvSpPr>
+            <a:spLocks noGrp="1" noRot="1" noChangeAspect="1"/>
+          </p:cNvSpPr>
           <p:nvPr>
             <p:ph type="sldImg" idx="2"/>
           </p:nvPr>
         </p:nvSpPr>
         <p:spPr>
           <a:xfrm>
-            <a:off x="381300" y="685800"/>
-            <a:ext cx="6096075" cy="3429000"/>
+            <a:off x="381000" y="685800"/>
+            <a:ext cx="6096000" cy="3429000"/>
           </a:xfrm>
           <a:custGeom>
             <a:avLst/>
@@ -775,7 +784,9 @@
       <p:sp>
         <p:nvSpPr>
           <p:cNvPr id="53" name="Google Shape;53;g3f52c767a14_17_0:notes"/>
-          <p:cNvSpPr txBox="1"/>
+          <p:cNvSpPr txBox="1">
+            <a:spLocks noGrp="1"/>
+          </p:cNvSpPr>
           <p:nvPr>
             <p:ph type="body" idx="1"/>
           </p:nvPr>
@@ -804,6 +815,7 @@
               </a:spcAft>
               <a:buNone/>
             </a:pPr>
+            <a:endParaRPr/>
           </a:p>
         </p:txBody>
       </p:sp>
@@ -816,11 +828,11 @@
 </file>
 
 <file path=ppt/notesSlides/notesSlide2.xml><?xml version="1.0" encoding="utf-8"?>
-<p:notes xmlns:a="http://schemas.openxmlformats.org/drawingml/2006/main" xmlns:r="http://schemas.openxmlformats.org/officeDocument/2006/relationships" xmlns:p="http://schemas.openxmlformats.org/presentationml/2006/main" showMasterPhAnim="0" showMasterSp="0">
+<p:notes xmlns:a="http://schemas.openxmlformats.org/drawingml/2006/main" xmlns:r="http://schemas.openxmlformats.org/officeDocument/2006/relationships" xmlns:p="http://schemas.openxmlformats.org/presentationml/2006/main" showMasterSp="0" showMasterPhAnim="0">
   <p:cSld>
     <p:spTree>
       <p:nvGrpSpPr>
-        <p:cNvPr id="68" name="Shape 68"/>
+        <p:cNvPr id="1" name="Shape 68"/>
         <p:cNvGrpSpPr/>
         <p:nvPr/>
       </p:nvGrpSpPr>
@@ -835,15 +847,17 @@
       <p:sp>
         <p:nvSpPr>
           <p:cNvPr id="69" name="Google Shape;69;g3f52c767a14_16_0:notes"/>
-          <p:cNvSpPr/>
+          <p:cNvSpPr>
+            <a:spLocks noGrp="1" noRot="1" noChangeAspect="1"/>
+          </p:cNvSpPr>
           <p:nvPr>
             <p:ph type="sldImg" idx="2"/>
           </p:nvPr>
         </p:nvSpPr>
         <p:spPr>
           <a:xfrm>
-            <a:off x="381300" y="685800"/>
-            <a:ext cx="6096075" cy="3429000"/>
+            <a:off x="381000" y="685800"/>
+            <a:ext cx="6096000" cy="3429000"/>
           </a:xfrm>
           <a:custGeom>
             <a:avLst/>
@@ -874,7 +888,9 @@
       <p:sp>
         <p:nvSpPr>
           <p:cNvPr id="70" name="Google Shape;70;g3f52c767a14_16_0:notes"/>
-          <p:cNvSpPr txBox="1"/>
+          <p:cNvSpPr txBox="1">
+            <a:spLocks noGrp="1"/>
+          </p:cNvSpPr>
           <p:nvPr>
             <p:ph type="body" idx="1"/>
           </p:nvPr>
@@ -903,6 +919,7 @@
               </a:spcAft>
               <a:buNone/>
             </a:pPr>
+            <a:endParaRPr/>
           </a:p>
         </p:txBody>
       </p:sp>
@@ -915,11 +932,11 @@
 </file>
 
 <file path=ppt/notesSlides/notesSlide3.xml><?xml version="1.0" encoding="utf-8"?>
-<p:notes xmlns:a="http://schemas.openxmlformats.org/drawingml/2006/main" xmlns:r="http://schemas.openxmlformats.org/officeDocument/2006/relationships" xmlns:p="http://schemas.openxmlformats.org/presentationml/2006/main" showMasterPhAnim="0" showMasterSp="0">
+<p:notes xmlns:a="http://schemas.openxmlformats.org/drawingml/2006/main" xmlns:r="http://schemas.openxmlformats.org/officeDocument/2006/relationships" xmlns:p="http://schemas.openxmlformats.org/presentationml/2006/main" showMasterSp="0" showMasterPhAnim="0">
   <p:cSld>
     <p:spTree>
       <p:nvGrpSpPr>
-        <p:cNvPr id="137" name="Shape 137"/>
+        <p:cNvPr id="1" name="Shape 137"/>
         <p:cNvGrpSpPr/>
         <p:nvPr/>
       </p:nvGrpSpPr>
@@ -934,15 +951,17 @@
       <p:sp>
         <p:nvSpPr>
           <p:cNvPr id="138" name="Google Shape;138;g3f52c767a14_15_0:notes"/>
-          <p:cNvSpPr/>
+          <p:cNvSpPr>
+            <a:spLocks noGrp="1" noRot="1" noChangeAspect="1"/>
+          </p:cNvSpPr>
           <p:nvPr>
             <p:ph type="sldImg" idx="2"/>
           </p:nvPr>
         </p:nvSpPr>
         <p:spPr>
           <a:xfrm>
-            <a:off x="381300" y="685800"/>
-            <a:ext cx="6096075" cy="3429000"/>
+            <a:off x="381000" y="685800"/>
+            <a:ext cx="6096000" cy="3429000"/>
           </a:xfrm>
           <a:custGeom>
             <a:avLst/>
@@ -973,7 +992,9 @@
       <p:sp>
         <p:nvSpPr>
           <p:cNvPr id="139" name="Google Shape;139;g3f52c767a14_15_0:notes"/>
-          <p:cNvSpPr txBox="1"/>
+          <p:cNvSpPr txBox="1">
+            <a:spLocks noGrp="1"/>
+          </p:cNvSpPr>
           <p:nvPr>
             <p:ph type="body" idx="1"/>
           </p:nvPr>
@@ -1002,6 +1023,7 @@
               </a:spcAft>
               <a:buNone/>
             </a:pPr>
+            <a:endParaRPr/>
           </a:p>
         </p:txBody>
       </p:sp>
@@ -1014,11 +1036,11 @@
 </file>
 
 <file path=ppt/notesSlides/notesSlide4.xml><?xml version="1.0" encoding="utf-8"?>
-<p:notes xmlns:a="http://schemas.openxmlformats.org/drawingml/2006/main" xmlns:r="http://schemas.openxmlformats.org/officeDocument/2006/relationships" xmlns:p="http://schemas.openxmlformats.org/presentationml/2006/main" showMasterPhAnim="0" showMasterSp="0">
+<p:notes xmlns:a="http://schemas.openxmlformats.org/drawingml/2006/main" xmlns:r="http://schemas.openxmlformats.org/officeDocument/2006/relationships" xmlns:p="http://schemas.openxmlformats.org/presentationml/2006/main" showMasterSp="0" showMasterPhAnim="0">
   <p:cSld>
     <p:spTree>
       <p:nvGrpSpPr>
-        <p:cNvPr id="173" name="Shape 173"/>
+        <p:cNvPr id="1" name="Shape 173"/>
         <p:cNvGrpSpPr/>
         <p:nvPr/>
       </p:nvGrpSpPr>
@@ -1033,15 +1055,17 @@
       <p:sp>
         <p:nvSpPr>
           <p:cNvPr id="174" name="Google Shape;174;g3f52c767a14_14_0:notes"/>
-          <p:cNvSpPr/>
+          <p:cNvSpPr>
+            <a:spLocks noGrp="1" noRot="1" noChangeAspect="1"/>
+          </p:cNvSpPr>
           <p:nvPr>
             <p:ph type="sldImg" idx="2"/>
           </p:nvPr>
         </p:nvSpPr>
         <p:spPr>
           <a:xfrm>
-            <a:off x="381300" y="685800"/>
-            <a:ext cx="6096075" cy="3429000"/>
+            <a:off x="381000" y="685800"/>
+            <a:ext cx="6096000" cy="3429000"/>
           </a:xfrm>
           <a:custGeom>
             <a:avLst/>
@@ -1072,7 +1096,9 @@
       <p:sp>
         <p:nvSpPr>
           <p:cNvPr id="175" name="Google Shape;175;g3f52c767a14_14_0:notes"/>
-          <p:cNvSpPr txBox="1"/>
+          <p:cNvSpPr txBox="1">
+            <a:spLocks noGrp="1"/>
+          </p:cNvSpPr>
           <p:nvPr>
             <p:ph type="body" idx="1"/>
           </p:nvPr>
@@ -1101,10 +1127,138 @@
               </a:spcAft>
               <a:buNone/>
             </a:pPr>
+            <a:endParaRPr/>
           </a:p>
         </p:txBody>
       </p:sp>
     </p:spTree>
+  </p:cSld>
+  <p:clrMapOvr>
+    <a:masterClrMapping/>
+  </p:clrMapOvr>
+</p:notes>
+</file>
+
+<file path=ppt/notesSlides/notesSlide5.xml><?xml version="1.0" encoding="utf-8"?>
+<p:notes xmlns:a="http://schemas.openxmlformats.org/drawingml/2006/main" xmlns:r="http://schemas.openxmlformats.org/officeDocument/2006/relationships" xmlns:p="http://schemas.openxmlformats.org/presentationml/2006/main" showMasterSp="0" showMasterPhAnim="0">
+  <p:cSld>
+    <p:spTree>
+      <p:nvGrpSpPr>
+        <p:cNvPr id="1" name="Shape 173">
+          <a:extLst>
+            <a:ext uri="{FF2B5EF4-FFF2-40B4-BE49-F238E27FC236}">
+              <a16:creationId xmlns:a16="http://schemas.microsoft.com/office/drawing/2014/main" id="{D7649ECF-F0FF-D126-8ED3-4D130839871F}"/>
+            </a:ext>
+          </a:extLst>
+        </p:cNvPr>
+        <p:cNvGrpSpPr/>
+        <p:nvPr/>
+      </p:nvGrpSpPr>
+      <p:grpSpPr>
+        <a:xfrm>
+          <a:off x="0" y="0"/>
+          <a:ext cx="0" cy="0"/>
+          <a:chOff x="0" y="0"/>
+          <a:chExt cx="0" cy="0"/>
+        </a:xfrm>
+      </p:grpSpPr>
+      <p:sp>
+        <p:nvSpPr>
+          <p:cNvPr id="174" name="Google Shape;174;g3f52c767a14_14_0:notes">
+            <a:extLst>
+              <a:ext uri="{FF2B5EF4-FFF2-40B4-BE49-F238E27FC236}">
+                <a16:creationId xmlns:a16="http://schemas.microsoft.com/office/drawing/2014/main" id="{3A74D9CF-F3B0-E574-5B9C-C96AC507A9DA}"/>
+              </a:ext>
+            </a:extLst>
+          </p:cNvPr>
+          <p:cNvSpPr>
+            <a:spLocks noGrp="1" noRot="1" noChangeAspect="1"/>
+          </p:cNvSpPr>
+          <p:nvPr>
+            <p:ph type="sldImg" idx="2"/>
+          </p:nvPr>
+        </p:nvSpPr>
+        <p:spPr>
+          <a:xfrm>
+            <a:off x="381000" y="685800"/>
+            <a:ext cx="6096000" cy="3429000"/>
+          </a:xfrm>
+          <a:custGeom>
+            <a:avLst/>
+            <a:gdLst/>
+            <a:ahLst/>
+            <a:cxnLst/>
+            <a:rect l="l" t="t" r="r" b="b"/>
+            <a:pathLst>
+              <a:path w="120000" h="120000" extrusionOk="0">
+                <a:moveTo>
+                  <a:pt x="0" y="0"/>
+                </a:moveTo>
+                <a:lnTo>
+                  <a:pt x="120000" y="0"/>
+                </a:lnTo>
+                <a:lnTo>
+                  <a:pt x="120000" y="120000"/>
+                </a:lnTo>
+                <a:lnTo>
+                  <a:pt x="0" y="120000"/>
+                </a:lnTo>
+                <a:close/>
+              </a:path>
+            </a:pathLst>
+          </a:custGeom>
+        </p:spPr>
+      </p:sp>
+      <p:sp>
+        <p:nvSpPr>
+          <p:cNvPr id="175" name="Google Shape;175;g3f52c767a14_14_0:notes">
+            <a:extLst>
+              <a:ext uri="{FF2B5EF4-FFF2-40B4-BE49-F238E27FC236}">
+                <a16:creationId xmlns:a16="http://schemas.microsoft.com/office/drawing/2014/main" id="{82907F4B-A6B5-E313-F661-02241C1B0120}"/>
+              </a:ext>
+            </a:extLst>
+          </p:cNvPr>
+          <p:cNvSpPr txBox="1">
+            <a:spLocks noGrp="1"/>
+          </p:cNvSpPr>
+          <p:nvPr>
+            <p:ph type="body" idx="1"/>
+          </p:nvPr>
+        </p:nvSpPr>
+        <p:spPr>
+          <a:xfrm>
+            <a:off x="685800" y="4343400"/>
+            <a:ext cx="5486400" cy="4114800"/>
+          </a:xfrm>
+          <a:prstGeom prst="rect">
+            <a:avLst/>
+          </a:prstGeom>
+        </p:spPr>
+        <p:txBody>
+          <a:bodyPr spcFirstLastPara="1" wrap="square" lIns="91425" tIns="91425" rIns="91425" bIns="91425" anchor="t" anchorCtr="0">
+            <a:noAutofit/>
+          </a:bodyPr>
+          <a:lstStyle/>
+          <a:p>
+            <a:pPr marL="0" lvl="0" indent="0" algn="l" rtl="0">
+              <a:spcBef>
+                <a:spcPts val="0"/>
+              </a:spcBef>
+              <a:spcAft>
+                <a:spcPts val="0"/>
+              </a:spcAft>
+              <a:buNone/>
+            </a:pPr>
+            <a:endParaRPr/>
+          </a:p>
+        </p:txBody>
+      </p:sp>
+    </p:spTree>
+    <p:extLst>
+      <p:ext uri="{BB962C8B-B14F-4D97-AF65-F5344CB8AC3E}">
+        <p14:creationId xmlns:p14="http://schemas.microsoft.com/office/powerpoint/2010/main" val="1033209266"/>
+      </p:ext>
+    </p:extLst>
   </p:cSld>
   <p:clrMapOvr>
     <a:masterClrMapping/>
@@ -1117,7 +1271,7 @@
   <p:cSld name="Generated (g3f52c767a14_13_0)">
     <p:spTree>
       <p:nvGrpSpPr>
-        <p:cNvPr id="9" name="Shape 9"/>
+        <p:cNvPr id="1" name="Shape 9"/>
         <p:cNvGrpSpPr/>
         <p:nvPr/>
       </p:nvGrpSpPr>
@@ -1142,7 +1296,7 @@
   <p:cSld name="CAPTION_ONLY">
     <p:spTree>
       <p:nvGrpSpPr>
-        <p:cNvPr id="42" name="Shape 42"/>
+        <p:cNvPr id="1" name="Shape 42"/>
         <p:cNvGrpSpPr/>
         <p:nvPr/>
       </p:nvGrpSpPr>
@@ -1157,7 +1311,9 @@
       <p:sp>
         <p:nvSpPr>
           <p:cNvPr id="43" name="Google Shape;43;p11"/>
-          <p:cNvSpPr txBox="1"/>
+          <p:cNvSpPr txBox="1">
+            <a:spLocks noGrp="1"/>
+          </p:cNvSpPr>
           <p:nvPr>
             <p:ph type="body" idx="1"/>
           </p:nvPr>
@@ -1191,13 +1347,17 @@
               <a:defRPr/>
             </a:lvl1pPr>
           </a:lstStyle>
-          <a:p/>
+          <a:p>
+            <a:endParaRPr/>
+          </a:p>
         </p:txBody>
       </p:sp>
       <p:sp>
         <p:nvSpPr>
           <p:cNvPr id="44" name="Google Shape;44;p11"/>
-          <p:cNvSpPr txBox="1"/>
+          <p:cNvSpPr txBox="1">
+            <a:spLocks noGrp="1"/>
+          </p:cNvSpPr>
           <p:nvPr>
             <p:ph type="sldNum" idx="12"/>
           </p:nvPr>
@@ -1265,6 +1425,7 @@
             </a:pPr>
             <a:fld id="{00000000-1234-1234-1234-123412341234}" type="slidenum">
               <a:rPr lang="en-GB"/>
+              <a:t>‹#›</a:t>
             </a:fld>
             <a:endParaRPr lang="en-GB"/>
           </a:p>
@@ -1283,7 +1444,7 @@
   <p:cSld name="BIG_NUMBER">
     <p:spTree>
       <p:nvGrpSpPr>
-        <p:cNvPr id="45" name="Shape 45"/>
+        <p:cNvPr id="1" name="Shape 45"/>
         <p:cNvGrpSpPr/>
         <p:nvPr/>
       </p:nvGrpSpPr>
@@ -1298,7 +1459,9 @@
       <p:sp>
         <p:nvSpPr>
           <p:cNvPr id="46" name="Google Shape;46;p12"/>
-          <p:cNvSpPr txBox="1"/>
+          <p:cNvSpPr txBox="1">
+            <a:spLocks noGrp="1"/>
+          </p:cNvSpPr>
           <p:nvPr>
             <p:ph type="title" hasCustomPrompt="1"/>
           </p:nvPr>
@@ -1427,7 +1590,9 @@
       <p:sp>
         <p:nvSpPr>
           <p:cNvPr id="47" name="Google Shape;47;p12"/>
-          <p:cNvSpPr txBox="1"/>
+          <p:cNvSpPr txBox="1">
+            <a:spLocks noGrp="1"/>
+          </p:cNvSpPr>
           <p:nvPr>
             <p:ph type="body" idx="1"/>
           </p:nvPr>
@@ -1546,13 +1711,17 @@
               <a:defRPr/>
             </a:lvl9pPr>
           </a:lstStyle>
-          <a:p/>
+          <a:p>
+            <a:endParaRPr/>
+          </a:p>
         </p:txBody>
       </p:sp>
       <p:sp>
         <p:nvSpPr>
           <p:cNvPr id="48" name="Google Shape;48;p12"/>
-          <p:cNvSpPr txBox="1"/>
+          <p:cNvSpPr txBox="1">
+            <a:spLocks noGrp="1"/>
+          </p:cNvSpPr>
           <p:nvPr>
             <p:ph type="sldNum" idx="12"/>
           </p:nvPr>
@@ -1620,6 +1789,7 @@
             </a:pPr>
             <a:fld id="{00000000-1234-1234-1234-123412341234}" type="slidenum">
               <a:rPr lang="en-GB"/>
+              <a:t>‹#›</a:t>
             </a:fld>
             <a:endParaRPr lang="en-GB"/>
           </a:p>
@@ -1634,11 +1804,11 @@
 </file>
 
 <file path=ppt/slideLayouts/slideLayout12.xml><?xml version="1.0" encoding="utf-8"?>
-<p:sldLayout xmlns:a="http://schemas.openxmlformats.org/drawingml/2006/main" xmlns:r="http://schemas.openxmlformats.org/officeDocument/2006/relationships" xmlns:p="http://schemas.openxmlformats.org/presentationml/2006/main" type="blank" matchingName="Blank">
+<p:sldLayout xmlns:a="http://schemas.openxmlformats.org/drawingml/2006/main" xmlns:r="http://schemas.openxmlformats.org/officeDocument/2006/relationships" xmlns:p="http://schemas.openxmlformats.org/presentationml/2006/main" matchingName="Blank" type="blank">
   <p:cSld name="BLANK">
     <p:spTree>
       <p:nvGrpSpPr>
-        <p:cNvPr id="49" name="Shape 49"/>
+        <p:cNvPr id="1" name="Shape 49"/>
         <p:cNvGrpSpPr/>
         <p:nvPr/>
       </p:nvGrpSpPr>
@@ -1653,7 +1823,9 @@
       <p:sp>
         <p:nvSpPr>
           <p:cNvPr id="50" name="Google Shape;50;p13"/>
-          <p:cNvSpPr txBox="1"/>
+          <p:cNvSpPr txBox="1">
+            <a:spLocks noGrp="1"/>
+          </p:cNvSpPr>
           <p:nvPr>
             <p:ph type="sldNum" idx="12"/>
           </p:nvPr>
@@ -1721,6 +1893,7 @@
             </a:pPr>
             <a:fld id="{00000000-1234-1234-1234-123412341234}" type="slidenum">
               <a:rPr lang="en-GB"/>
+              <a:t>‹#›</a:t>
             </a:fld>
             <a:endParaRPr lang="en-GB"/>
           </a:p>
@@ -1735,11 +1908,11 @@
 </file>
 
 <file path=ppt/slideLayouts/slideLayout2.xml><?xml version="1.0" encoding="utf-8"?>
-<p:sldLayout xmlns:a="http://schemas.openxmlformats.org/drawingml/2006/main" xmlns:r="http://schemas.openxmlformats.org/officeDocument/2006/relationships" xmlns:p="http://schemas.openxmlformats.org/presentationml/2006/main" type="title" matchingName="Title slide">
+<p:sldLayout xmlns:a="http://schemas.openxmlformats.org/drawingml/2006/main" xmlns:r="http://schemas.openxmlformats.org/officeDocument/2006/relationships" xmlns:p="http://schemas.openxmlformats.org/presentationml/2006/main" matchingName="Title slide" type="title">
   <p:cSld name="TITLE">
     <p:spTree>
       <p:nvGrpSpPr>
-        <p:cNvPr id="10" name="Shape 10"/>
+        <p:cNvPr id="1" name="Shape 10"/>
         <p:cNvGrpSpPr/>
         <p:nvPr/>
       </p:nvGrpSpPr>
@@ -1754,7 +1927,9 @@
       <p:sp>
         <p:nvSpPr>
           <p:cNvPr id="11" name="Google Shape;11;p3"/>
-          <p:cNvSpPr txBox="1"/>
+          <p:cNvSpPr txBox="1">
+            <a:spLocks noGrp="1"/>
+          </p:cNvSpPr>
           <p:nvPr>
             <p:ph type="ctrTitle"/>
           </p:nvPr>
@@ -1873,13 +2048,17 @@
               <a:defRPr sz="5200"/>
             </a:lvl9pPr>
           </a:lstStyle>
-          <a:p/>
+          <a:p>
+            <a:endParaRPr/>
+          </a:p>
         </p:txBody>
       </p:sp>
       <p:sp>
         <p:nvSpPr>
           <p:cNvPr id="12" name="Google Shape;12;p3"/>
-          <p:cNvSpPr txBox="1"/>
+          <p:cNvSpPr txBox="1">
+            <a:spLocks noGrp="1"/>
+          </p:cNvSpPr>
           <p:nvPr>
             <p:ph type="subTitle" idx="1"/>
           </p:nvPr>
@@ -2025,13 +2204,17 @@
               <a:defRPr sz="2800"/>
             </a:lvl9pPr>
           </a:lstStyle>
-          <a:p/>
+          <a:p>
+            <a:endParaRPr/>
+          </a:p>
         </p:txBody>
       </p:sp>
       <p:sp>
         <p:nvSpPr>
           <p:cNvPr id="13" name="Google Shape;13;p3"/>
-          <p:cNvSpPr txBox="1"/>
+          <p:cNvSpPr txBox="1">
+            <a:spLocks noGrp="1"/>
+          </p:cNvSpPr>
           <p:nvPr>
             <p:ph type="sldNum" idx="12"/>
           </p:nvPr>
@@ -2099,6 +2282,7 @@
             </a:pPr>
             <a:fld id="{00000000-1234-1234-1234-123412341234}" type="slidenum">
               <a:rPr lang="en-GB"/>
+              <a:t>‹#›</a:t>
             </a:fld>
             <a:endParaRPr lang="en-GB"/>
           </a:p>
@@ -2113,11 +2297,11 @@
 </file>
 
 <file path=ppt/slideLayouts/slideLayout3.xml><?xml version="1.0" encoding="utf-8"?>
-<p:sldLayout xmlns:a="http://schemas.openxmlformats.org/drawingml/2006/main" xmlns:r="http://schemas.openxmlformats.org/officeDocument/2006/relationships" xmlns:p="http://schemas.openxmlformats.org/presentationml/2006/main" type="secHead" matchingName="Section header">
+<p:sldLayout xmlns:a="http://schemas.openxmlformats.org/drawingml/2006/main" xmlns:r="http://schemas.openxmlformats.org/officeDocument/2006/relationships" xmlns:p="http://schemas.openxmlformats.org/presentationml/2006/main" matchingName="Section header" type="secHead">
   <p:cSld name="SECTION_HEADER">
     <p:spTree>
       <p:nvGrpSpPr>
-        <p:cNvPr id="14" name="Shape 14"/>
+        <p:cNvPr id="1" name="Shape 14"/>
         <p:cNvGrpSpPr/>
         <p:nvPr/>
       </p:nvGrpSpPr>
@@ -2132,7 +2316,9 @@
       <p:sp>
         <p:nvSpPr>
           <p:cNvPr id="15" name="Google Shape;15;p4"/>
-          <p:cNvSpPr txBox="1"/>
+          <p:cNvSpPr txBox="1">
+            <a:spLocks noGrp="1"/>
+          </p:cNvSpPr>
           <p:nvPr>
             <p:ph type="title"/>
           </p:nvPr>
@@ -2251,13 +2437,17 @@
               <a:defRPr sz="3600"/>
             </a:lvl9pPr>
           </a:lstStyle>
-          <a:p/>
+          <a:p>
+            <a:endParaRPr/>
+          </a:p>
         </p:txBody>
       </p:sp>
       <p:sp>
         <p:nvSpPr>
           <p:cNvPr id="16" name="Google Shape;16;p4"/>
-          <p:cNvSpPr txBox="1"/>
+          <p:cNvSpPr txBox="1">
+            <a:spLocks noGrp="1"/>
+          </p:cNvSpPr>
           <p:nvPr>
             <p:ph type="sldNum" idx="12"/>
           </p:nvPr>
@@ -2325,6 +2515,7 @@
             </a:pPr>
             <a:fld id="{00000000-1234-1234-1234-123412341234}" type="slidenum">
               <a:rPr lang="en-GB"/>
+              <a:t>‹#›</a:t>
             </a:fld>
             <a:endParaRPr lang="en-GB"/>
           </a:p>
@@ -2339,11 +2530,11 @@
 </file>
 
 <file path=ppt/slideLayouts/slideLayout4.xml><?xml version="1.0" encoding="utf-8"?>
-<p:sldLayout xmlns:a="http://schemas.openxmlformats.org/drawingml/2006/main" xmlns:r="http://schemas.openxmlformats.org/officeDocument/2006/relationships" xmlns:p="http://schemas.openxmlformats.org/presentationml/2006/main" type="tx" matchingName="Title and body">
+<p:sldLayout xmlns:a="http://schemas.openxmlformats.org/drawingml/2006/main" xmlns:r="http://schemas.openxmlformats.org/officeDocument/2006/relationships" xmlns:p="http://schemas.openxmlformats.org/presentationml/2006/main" matchingName="Title and body" type="tx">
   <p:cSld name="TITLE_AND_BODY">
     <p:spTree>
       <p:nvGrpSpPr>
-        <p:cNvPr id="17" name="Shape 17"/>
+        <p:cNvPr id="1" name="Shape 17"/>
         <p:cNvGrpSpPr/>
         <p:nvPr/>
       </p:nvGrpSpPr>
@@ -2358,7 +2549,9 @@
       <p:sp>
         <p:nvSpPr>
           <p:cNvPr id="18" name="Google Shape;18;p5"/>
-          <p:cNvSpPr txBox="1"/>
+          <p:cNvSpPr txBox="1">
+            <a:spLocks noGrp="1"/>
+          </p:cNvSpPr>
           <p:nvPr>
             <p:ph type="title"/>
           </p:nvPr>
@@ -2477,13 +2670,17 @@
               <a:defRPr/>
             </a:lvl9pPr>
           </a:lstStyle>
-          <a:p/>
+          <a:p>
+            <a:endParaRPr/>
+          </a:p>
         </p:txBody>
       </p:sp>
       <p:sp>
         <p:nvSpPr>
           <p:cNvPr id="19" name="Google Shape;19;p5"/>
-          <p:cNvSpPr txBox="1"/>
+          <p:cNvSpPr txBox="1">
+            <a:spLocks noGrp="1"/>
+          </p:cNvSpPr>
           <p:nvPr>
             <p:ph type="body" idx="1"/>
           </p:nvPr>
@@ -2602,13 +2799,17 @@
               <a:defRPr/>
             </a:lvl9pPr>
           </a:lstStyle>
-          <a:p/>
+          <a:p>
+            <a:endParaRPr/>
+          </a:p>
         </p:txBody>
       </p:sp>
       <p:sp>
         <p:nvSpPr>
           <p:cNvPr id="20" name="Google Shape;20;p5"/>
-          <p:cNvSpPr txBox="1"/>
+          <p:cNvSpPr txBox="1">
+            <a:spLocks noGrp="1"/>
+          </p:cNvSpPr>
           <p:nvPr>
             <p:ph type="sldNum" idx="12"/>
           </p:nvPr>
@@ -2676,6 +2877,7 @@
             </a:pPr>
             <a:fld id="{00000000-1234-1234-1234-123412341234}" type="slidenum">
               <a:rPr lang="en-GB"/>
+              <a:t>‹#›</a:t>
             </a:fld>
             <a:endParaRPr lang="en-GB"/>
           </a:p>
@@ -2690,11 +2892,11 @@
 </file>
 
 <file path=ppt/slideLayouts/slideLayout5.xml><?xml version="1.0" encoding="utf-8"?>
-<p:sldLayout xmlns:a="http://schemas.openxmlformats.org/drawingml/2006/main" xmlns:r="http://schemas.openxmlformats.org/officeDocument/2006/relationships" xmlns:p="http://schemas.openxmlformats.org/presentationml/2006/main" type="twoColTx" matchingName="Title and two columns">
+<p:sldLayout xmlns:a="http://schemas.openxmlformats.org/drawingml/2006/main" xmlns:r="http://schemas.openxmlformats.org/officeDocument/2006/relationships" xmlns:p="http://schemas.openxmlformats.org/presentationml/2006/main" matchingName="Title and two columns" type="twoColTx">
   <p:cSld name="TITLE_AND_TWO_COLUMNS">
     <p:spTree>
       <p:nvGrpSpPr>
-        <p:cNvPr id="21" name="Shape 21"/>
+        <p:cNvPr id="1" name="Shape 21"/>
         <p:cNvGrpSpPr/>
         <p:nvPr/>
       </p:nvGrpSpPr>
@@ -2709,7 +2911,9 @@
       <p:sp>
         <p:nvSpPr>
           <p:cNvPr id="22" name="Google Shape;22;p6"/>
-          <p:cNvSpPr txBox="1"/>
+          <p:cNvSpPr txBox="1">
+            <a:spLocks noGrp="1"/>
+          </p:cNvSpPr>
           <p:nvPr>
             <p:ph type="title"/>
           </p:nvPr>
@@ -2828,13 +3032,17 @@
               <a:defRPr/>
             </a:lvl9pPr>
           </a:lstStyle>
-          <a:p/>
+          <a:p>
+            <a:endParaRPr/>
+          </a:p>
         </p:txBody>
       </p:sp>
       <p:sp>
         <p:nvSpPr>
           <p:cNvPr id="23" name="Google Shape;23;p6"/>
-          <p:cNvSpPr txBox="1"/>
+          <p:cNvSpPr txBox="1">
+            <a:spLocks noGrp="1"/>
+          </p:cNvSpPr>
           <p:nvPr>
             <p:ph type="body" idx="1"/>
           </p:nvPr>
@@ -2953,13 +3161,17 @@
               <a:defRPr sz="1200"/>
             </a:lvl9pPr>
           </a:lstStyle>
-          <a:p/>
+          <a:p>
+            <a:endParaRPr/>
+          </a:p>
         </p:txBody>
       </p:sp>
       <p:sp>
         <p:nvSpPr>
           <p:cNvPr id="24" name="Google Shape;24;p6"/>
-          <p:cNvSpPr txBox="1"/>
+          <p:cNvSpPr txBox="1">
+            <a:spLocks noGrp="1"/>
+          </p:cNvSpPr>
           <p:nvPr>
             <p:ph type="body" idx="2"/>
           </p:nvPr>
@@ -3078,13 +3290,17 @@
               <a:defRPr sz="1200"/>
             </a:lvl9pPr>
           </a:lstStyle>
-          <a:p/>
+          <a:p>
+            <a:endParaRPr/>
+          </a:p>
         </p:txBody>
       </p:sp>
       <p:sp>
         <p:nvSpPr>
           <p:cNvPr id="25" name="Google Shape;25;p6"/>
-          <p:cNvSpPr txBox="1"/>
+          <p:cNvSpPr txBox="1">
+            <a:spLocks noGrp="1"/>
+          </p:cNvSpPr>
           <p:nvPr>
             <p:ph type="sldNum" idx="12"/>
           </p:nvPr>
@@ -3152,6 +3368,7 @@
             </a:pPr>
             <a:fld id="{00000000-1234-1234-1234-123412341234}" type="slidenum">
               <a:rPr lang="en-GB"/>
+              <a:t>‹#›</a:t>
             </a:fld>
             <a:endParaRPr lang="en-GB"/>
           </a:p>
@@ -3166,11 +3383,11 @@
 </file>
 
 <file path=ppt/slideLayouts/slideLayout6.xml><?xml version="1.0" encoding="utf-8"?>
-<p:sldLayout xmlns:a="http://schemas.openxmlformats.org/drawingml/2006/main" xmlns:r="http://schemas.openxmlformats.org/officeDocument/2006/relationships" xmlns:p="http://schemas.openxmlformats.org/presentationml/2006/main" type="titleOnly" matchingName="Title only">
+<p:sldLayout xmlns:a="http://schemas.openxmlformats.org/drawingml/2006/main" xmlns:r="http://schemas.openxmlformats.org/officeDocument/2006/relationships" xmlns:p="http://schemas.openxmlformats.org/presentationml/2006/main" matchingName="Title only" type="titleOnly">
   <p:cSld name="TITLE_ONLY">
     <p:spTree>
       <p:nvGrpSpPr>
-        <p:cNvPr id="26" name="Shape 26"/>
+        <p:cNvPr id="1" name="Shape 26"/>
         <p:cNvGrpSpPr/>
         <p:nvPr/>
       </p:nvGrpSpPr>
@@ -3185,7 +3402,9 @@
       <p:sp>
         <p:nvSpPr>
           <p:cNvPr id="27" name="Google Shape;27;p7"/>
-          <p:cNvSpPr txBox="1"/>
+          <p:cNvSpPr txBox="1">
+            <a:spLocks noGrp="1"/>
+          </p:cNvSpPr>
           <p:nvPr>
             <p:ph type="title"/>
           </p:nvPr>
@@ -3304,13 +3523,17 @@
               <a:defRPr/>
             </a:lvl9pPr>
           </a:lstStyle>
-          <a:p/>
+          <a:p>
+            <a:endParaRPr/>
+          </a:p>
         </p:txBody>
       </p:sp>
       <p:sp>
         <p:nvSpPr>
           <p:cNvPr id="28" name="Google Shape;28;p7"/>
-          <p:cNvSpPr txBox="1"/>
+          <p:cNvSpPr txBox="1">
+            <a:spLocks noGrp="1"/>
+          </p:cNvSpPr>
           <p:nvPr>
             <p:ph type="sldNum" idx="12"/>
           </p:nvPr>
@@ -3378,6 +3601,7 @@
             </a:pPr>
             <a:fld id="{00000000-1234-1234-1234-123412341234}" type="slidenum">
               <a:rPr lang="en-GB"/>
+              <a:t>‹#›</a:t>
             </a:fld>
             <a:endParaRPr lang="en-GB"/>
           </a:p>
@@ -3396,7 +3620,7 @@
   <p:cSld name="ONE_COLUMN_TEXT">
     <p:spTree>
       <p:nvGrpSpPr>
-        <p:cNvPr id="29" name="Shape 29"/>
+        <p:cNvPr id="1" name="Shape 29"/>
         <p:cNvGrpSpPr/>
         <p:nvPr/>
       </p:nvGrpSpPr>
@@ -3411,7 +3635,9 @@
       <p:sp>
         <p:nvSpPr>
           <p:cNvPr id="30" name="Google Shape;30;p8"/>
-          <p:cNvSpPr txBox="1"/>
+          <p:cNvSpPr txBox="1">
+            <a:spLocks noGrp="1"/>
+          </p:cNvSpPr>
           <p:nvPr>
             <p:ph type="title"/>
           </p:nvPr>
@@ -3530,13 +3756,17 @@
               <a:defRPr sz="2400"/>
             </a:lvl9pPr>
           </a:lstStyle>
-          <a:p/>
+          <a:p>
+            <a:endParaRPr/>
+          </a:p>
         </p:txBody>
       </p:sp>
       <p:sp>
         <p:nvSpPr>
           <p:cNvPr id="31" name="Google Shape;31;p8"/>
-          <p:cNvSpPr txBox="1"/>
+          <p:cNvSpPr txBox="1">
+            <a:spLocks noGrp="1"/>
+          </p:cNvSpPr>
           <p:nvPr>
             <p:ph type="body" idx="1"/>
           </p:nvPr>
@@ -3655,13 +3885,17 @@
               <a:defRPr sz="1200"/>
             </a:lvl9pPr>
           </a:lstStyle>
-          <a:p/>
+          <a:p>
+            <a:endParaRPr/>
+          </a:p>
         </p:txBody>
       </p:sp>
       <p:sp>
         <p:nvSpPr>
           <p:cNvPr id="32" name="Google Shape;32;p8"/>
-          <p:cNvSpPr txBox="1"/>
+          <p:cNvSpPr txBox="1">
+            <a:spLocks noGrp="1"/>
+          </p:cNvSpPr>
           <p:nvPr>
             <p:ph type="sldNum" idx="12"/>
           </p:nvPr>
@@ -3729,6 +3963,7 @@
             </a:pPr>
             <a:fld id="{00000000-1234-1234-1234-123412341234}" type="slidenum">
               <a:rPr lang="en-GB"/>
+              <a:t>‹#›</a:t>
             </a:fld>
             <a:endParaRPr lang="en-GB"/>
           </a:p>
@@ -3747,7 +3982,7 @@
   <p:cSld name="MAIN_POINT">
     <p:spTree>
       <p:nvGrpSpPr>
-        <p:cNvPr id="33" name="Shape 33"/>
+        <p:cNvPr id="1" name="Shape 33"/>
         <p:cNvGrpSpPr/>
         <p:nvPr/>
       </p:nvGrpSpPr>
@@ -3762,7 +3997,9 @@
       <p:sp>
         <p:nvSpPr>
           <p:cNvPr id="34" name="Google Shape;34;p9"/>
-          <p:cNvSpPr txBox="1"/>
+          <p:cNvSpPr txBox="1">
+            <a:spLocks noGrp="1"/>
+          </p:cNvSpPr>
           <p:nvPr>
             <p:ph type="title"/>
           </p:nvPr>
@@ -3881,13 +4118,17 @@
               <a:defRPr sz="4800"/>
             </a:lvl9pPr>
           </a:lstStyle>
-          <a:p/>
+          <a:p>
+            <a:endParaRPr/>
+          </a:p>
         </p:txBody>
       </p:sp>
       <p:sp>
         <p:nvSpPr>
           <p:cNvPr id="35" name="Google Shape;35;p9"/>
-          <p:cNvSpPr txBox="1"/>
+          <p:cNvSpPr txBox="1">
+            <a:spLocks noGrp="1"/>
+          </p:cNvSpPr>
           <p:nvPr>
             <p:ph type="sldNum" idx="12"/>
           </p:nvPr>
@@ -3955,6 +4196,7 @@
             </a:pPr>
             <a:fld id="{00000000-1234-1234-1234-123412341234}" type="slidenum">
               <a:rPr lang="en-GB"/>
+              <a:t>‹#›</a:t>
             </a:fld>
             <a:endParaRPr lang="en-GB"/>
           </a:p>
@@ -3973,7 +4215,7 @@
   <p:cSld name="SECTION_TITLE_AND_DESCRIPTION">
     <p:spTree>
       <p:nvGrpSpPr>
-        <p:cNvPr id="36" name="Shape 36"/>
+        <p:cNvPr id="1" name="Shape 36"/>
         <p:cNvGrpSpPr/>
         <p:nvPr/>
       </p:nvGrpSpPr>
@@ -4021,13 +4263,16 @@
               </a:spcAft>
               <a:buNone/>
             </a:pPr>
+            <a:endParaRPr/>
           </a:p>
         </p:txBody>
       </p:sp>
       <p:sp>
         <p:nvSpPr>
           <p:cNvPr id="38" name="Google Shape;38;p10"/>
-          <p:cNvSpPr txBox="1"/>
+          <p:cNvSpPr txBox="1">
+            <a:spLocks noGrp="1"/>
+          </p:cNvSpPr>
           <p:nvPr>
             <p:ph type="title"/>
           </p:nvPr>
@@ -4146,13 +4391,17 @@
               <a:defRPr sz="4200"/>
             </a:lvl9pPr>
           </a:lstStyle>
-          <a:p/>
+          <a:p>
+            <a:endParaRPr/>
+          </a:p>
         </p:txBody>
       </p:sp>
       <p:sp>
         <p:nvSpPr>
           <p:cNvPr id="39" name="Google Shape;39;p10"/>
-          <p:cNvSpPr txBox="1"/>
+          <p:cNvSpPr txBox="1">
+            <a:spLocks noGrp="1"/>
+          </p:cNvSpPr>
           <p:nvPr>
             <p:ph type="subTitle" idx="1"/>
           </p:nvPr>
@@ -4298,13 +4547,17 @@
               <a:defRPr sz="2100"/>
             </a:lvl9pPr>
           </a:lstStyle>
-          <a:p/>
+          <a:p>
+            <a:endParaRPr/>
+          </a:p>
         </p:txBody>
       </p:sp>
       <p:sp>
         <p:nvSpPr>
           <p:cNvPr id="40" name="Google Shape;40;p10"/>
-          <p:cNvSpPr txBox="1"/>
+          <p:cNvSpPr txBox="1">
+            <a:spLocks noGrp="1"/>
+          </p:cNvSpPr>
           <p:nvPr>
             <p:ph type="body" idx="2"/>
           </p:nvPr>
@@ -4423,13 +4676,17 @@
               <a:defRPr/>
             </a:lvl9pPr>
           </a:lstStyle>
-          <a:p/>
+          <a:p>
+            <a:endParaRPr/>
+          </a:p>
         </p:txBody>
       </p:sp>
       <p:sp>
         <p:nvSpPr>
           <p:cNvPr id="41" name="Google Shape;41;p10"/>
-          <p:cNvSpPr txBox="1"/>
+          <p:cNvSpPr txBox="1">
+            <a:spLocks noGrp="1"/>
+          </p:cNvSpPr>
           <p:nvPr>
             <p:ph type="sldNum" idx="12"/>
           </p:nvPr>
@@ -4497,6 +4754,7 @@
             </a:pPr>
             <a:fld id="{00000000-1234-1234-1234-123412341234}" type="slidenum">
               <a:rPr lang="en-GB"/>
+              <a:t>‹#›</a:t>
             </a:fld>
             <a:endParaRPr lang="en-GB"/>
           </a:p>
@@ -4523,7 +4781,7 @@
     </p:bg>
     <p:spTree>
       <p:nvGrpSpPr>
-        <p:cNvPr id="5" name="Shape 5"/>
+        <p:cNvPr id="1" name="Shape 5"/>
         <p:cNvGrpSpPr/>
         <p:nvPr/>
       </p:nvGrpSpPr>
@@ -4538,7 +4796,9 @@
       <p:sp>
         <p:nvSpPr>
           <p:cNvPr id="6" name="Google Shape;6;p1"/>
-          <p:cNvSpPr txBox="1"/>
+          <p:cNvSpPr txBox="1">
+            <a:spLocks noGrp="1"/>
+          </p:cNvSpPr>
           <p:nvPr>
             <p:ph type="title"/>
           </p:nvPr>
@@ -4724,13 +4984,17 @@
               </a:defRPr>
             </a:lvl9pPr>
           </a:lstStyle>
-          <a:p/>
+          <a:p>
+            <a:endParaRPr/>
+          </a:p>
         </p:txBody>
       </p:sp>
       <p:sp>
         <p:nvSpPr>
           <p:cNvPr id="7" name="Google Shape;7;p1"/>
-          <p:cNvSpPr txBox="1"/>
+          <p:cNvSpPr txBox="1">
+            <a:spLocks noGrp="1"/>
+          </p:cNvSpPr>
           <p:nvPr>
             <p:ph type="body" idx="1"/>
           </p:nvPr>
@@ -4943,13 +5207,17 @@
               </a:defRPr>
             </a:lvl9pPr>
           </a:lstStyle>
-          <a:p/>
+          <a:p>
+            <a:endParaRPr/>
+          </a:p>
         </p:txBody>
       </p:sp>
       <p:sp>
         <p:nvSpPr>
           <p:cNvPr id="8" name="Google Shape;8;p1"/>
-          <p:cNvSpPr txBox="1"/>
+          <p:cNvSpPr txBox="1">
+            <a:spLocks noGrp="1"/>
+          </p:cNvSpPr>
           <p:nvPr>
             <p:ph type="sldNum" idx="12"/>
           </p:nvPr>
@@ -5057,6 +5325,7 @@
             </a:pPr>
             <a:fld id="{00000000-1234-1234-1234-123412341234}" type="slidenum">
               <a:rPr lang="en-GB"/>
+              <a:t>‹#›</a:t>
             </a:fld>
             <a:endParaRPr lang="en-GB"/>
           </a:p>
@@ -5777,7 +6046,7 @@
   <p:cSld>
     <p:spTree>
       <p:nvGrpSpPr>
-        <p:cNvPr id="54" name="Shape 54"/>
+        <p:cNvPr id="1" name="Shape 54"/>
         <p:cNvGrpSpPr/>
         <p:nvPr/>
       </p:nvGrpSpPr>
@@ -5802,6 +6071,9 @@
             <a:chOff x="0" y="0"/>
             <a:chExt cx="9144000" cy="5143500"/>
           </a:xfrm>
+          <a:solidFill>
+            <a:schemeClr val="bg1"/>
+          </a:solidFill>
         </p:grpSpPr>
         <p:sp>
           <p:nvSpPr>
@@ -5817,9 +6089,7 @@
             <a:prstGeom prst="rect">
               <a:avLst/>
             </a:prstGeom>
-            <a:solidFill>
-              <a:srgbClr val="FFDE59"/>
-            </a:solidFill>
+            <a:grpFill/>
             <a:ln>
               <a:noFill/>
             </a:ln>
@@ -5839,6 +6109,7 @@
                 </a:spcAft>
                 <a:buNone/>
               </a:pPr>
+              <a:endParaRPr/>
             </a:p>
           </p:txBody>
         </p:sp>
@@ -5855,6 +6126,7 @@
               <a:chOff x="47625" y="47625"/>
               <a:chExt cx="914550" cy="866850"/>
             </a:xfrm>
+            <a:grpFill/>
           </p:grpSpPr>
           <p:sp>
             <p:nvSpPr>
@@ -5909,9 +6181,7 @@
                   </a:path>
                 </a:pathLst>
               </a:custGeom>
-              <a:solidFill>
-                <a:srgbClr val="111111"/>
-              </a:solidFill>
+              <a:grpFill/>
               <a:ln>
                 <a:noFill/>
               </a:ln>
@@ -5931,6 +6201,7 @@
                   </a:spcAft>
                   <a:buNone/>
                 </a:pPr>
+                <a:endParaRPr/>
               </a:p>
             </p:txBody>
           </p:sp>
@@ -5987,9 +6258,7 @@
                   </a:path>
                 </a:pathLst>
               </a:custGeom>
-              <a:solidFill>
-                <a:srgbClr val="FFDE59"/>
-              </a:solidFill>
+              <a:grpFill/>
               <a:ln w="38100" cap="flat" cmpd="sng">
                 <a:solidFill>
                   <a:srgbClr val="111111"/>
@@ -6015,6 +6284,7 @@
                   </a:spcAft>
                   <a:buNone/>
                 </a:pPr>
+                <a:endParaRPr/>
               </a:p>
             </p:txBody>
           </p:sp>
@@ -6032,6 +6302,7 @@
               <a:chOff x="47625" y="47625"/>
               <a:chExt cx="914550" cy="866850"/>
             </a:xfrm>
+            <a:grpFill/>
           </p:grpSpPr>
           <p:sp>
             <p:nvSpPr>
@@ -6086,9 +6357,7 @@
                   </a:path>
                 </a:pathLst>
               </a:custGeom>
-              <a:solidFill>
-                <a:srgbClr val="111111"/>
-              </a:solidFill>
+              <a:grpFill/>
               <a:ln>
                 <a:noFill/>
               </a:ln>
@@ -6108,6 +6377,7 @@
                   </a:spcAft>
                   <a:buNone/>
                 </a:pPr>
+                <a:endParaRPr/>
               </a:p>
             </p:txBody>
           </p:sp>
@@ -6164,9 +6434,7 @@
                   </a:path>
                 </a:pathLst>
               </a:custGeom>
-              <a:solidFill>
-                <a:srgbClr val="FFDE59"/>
-              </a:solidFill>
+              <a:grpFill/>
               <a:ln w="38100" cap="flat" cmpd="sng">
                 <a:solidFill>
                   <a:srgbClr val="111111"/>
@@ -6192,6 +6460,7 @@
                   </a:spcAft>
                   <a:buNone/>
                 </a:pPr>
+                <a:endParaRPr/>
               </a:p>
             </p:txBody>
           </p:sp>
@@ -6209,6 +6478,7 @@
               <a:chOff x="38100" y="38100"/>
               <a:chExt cx="685800" cy="685800"/>
             </a:xfrm>
+            <a:grpFill/>
           </p:grpSpPr>
           <p:sp>
             <p:nvSpPr>
@@ -6224,9 +6494,7 @@
               <a:prstGeom prst="ellipse">
                 <a:avLst/>
               </a:prstGeom>
-              <a:solidFill>
-                <a:srgbClr val="FFDE59"/>
-              </a:solidFill>
+              <a:grpFill/>
               <a:ln w="38100" cap="flat" cmpd="sng">
                 <a:solidFill>
                   <a:srgbClr val="111111"/>
@@ -6252,6 +6520,7 @@
                   </a:spcAft>
                   <a:buNone/>
                 </a:pPr>
+                <a:endParaRPr/>
               </a:p>
             </p:txBody>
           </p:sp>
@@ -6269,7 +6538,7 @@
               <a:prstGeom prst="rect">
                 <a:avLst/>
               </a:prstGeom>
-              <a:noFill/>
+              <a:grpFill/>
               <a:ln>
                 <a:noFill/>
               </a:ln>
@@ -6301,15 +6570,6 @@
                   </a:rPr>
                   <a:t>₹</a:t>
                 </a:r>
-                <a:endParaRPr lang="en-GB" sz="2700" b="1">
-                  <a:solidFill>
-                    <a:srgbClr val="111111"/>
-                  </a:solidFill>
-                  <a:latin typeface="Space Grotesk"/>
-                  <a:ea typeface="Space Grotesk"/>
-                  <a:cs typeface="Space Grotesk"/>
-                  <a:sym typeface="Space Grotesk"/>
-                </a:endParaRPr>
               </a:p>
             </p:txBody>
           </p:sp>
@@ -6330,11 +6590,7 @@
                 <a:gd name="adj" fmla="val 3200"/>
               </a:avLst>
             </a:prstGeom>
-            <a:solidFill>
-              <a:srgbClr val="000000">
-                <a:alpha val="0"/>
-              </a:srgbClr>
-            </a:solidFill>
+            <a:grpFill/>
             <a:ln w="76200" cap="flat" cmpd="sng">
               <a:solidFill>
                 <a:srgbClr val="111111"/>
@@ -6360,6 +6616,7 @@
                 </a:spcAft>
                 <a:buNone/>
               </a:pPr>
+              <a:endParaRPr/>
             </a:p>
           </p:txBody>
         </p:sp>
@@ -6399,59 +6656,21 @@
               <a:buNone/>
             </a:pPr>
             <a:r>
-              <a:rPr lang="en-GB" sz="3300" b="0">
+              <a:rPr lang="en-GB" sz="4400" b="0" dirty="0">
                 <a:solidFill>
-                  <a:srgbClr val="FF66C4"/>
+                  <a:srgbClr val="7030A0"/>
                 </a:solidFill>
                 <a:latin typeface="Space Grotesk"/>
                 <a:ea typeface="Space Grotesk"/>
                 <a:cs typeface="Space Grotesk"/>
                 <a:sym typeface="Space Grotesk"/>
               </a:rPr>
-              <a:t>The Chennai Pocket Money Paradox</a:t>
+              <a:t>The Pocket Money Paradox</a:t>
             </a:r>
-            <a:endParaRPr sz="3300" b="0">
+            <a:endParaRPr sz="4400" b="0" dirty="0">
               <a:solidFill>
-                <a:srgbClr val="FF66C4"/>
+                <a:srgbClr val="7030A0"/>
               </a:solidFill>
-              <a:latin typeface="Space Grotesk"/>
-              <a:ea typeface="Space Grotesk"/>
-              <a:cs typeface="Space Grotesk"/>
-              <a:sym typeface="Space Grotesk"/>
-            </a:endParaRPr>
-          </a:p>
-          <a:p>
-            <a:pPr marL="0" lvl="0" indent="0" algn="ctr" rtl="0">
-              <a:spcBef>
-                <a:spcPts val="2700"/>
-              </a:spcBef>
-              <a:spcAft>
-                <a:spcPts val="0"/>
-              </a:spcAft>
-              <a:buNone/>
-            </a:pPr>
-            <a:r>
-              <a:rPr lang="en-GB" sz="1500" b="1">
-                <a:solidFill>
-                  <a:srgbClr val="111111"/>
-                </a:solidFill>
-                <a:highlight>
-                  <a:srgbClr val="FFFFFF"/>
-                </a:highlight>
-                <a:latin typeface="Space Grotesk"/>
-                <a:ea typeface="Space Grotesk"/>
-                <a:cs typeface="Space Grotesk"/>
-                <a:sym typeface="Space Grotesk"/>
-              </a:rPr>
-              <a:t>How one TN billionaire's son crashed a simple statistics lesson.</a:t>
-            </a:r>
-            <a:endParaRPr sz="1500" b="1">
-              <a:solidFill>
-                <a:srgbClr val="111111"/>
-              </a:solidFill>
-              <a:highlight>
-                <a:srgbClr val="FFFFFF"/>
-              </a:highlight>
               <a:latin typeface="Space Grotesk"/>
               <a:ea typeface="Space Grotesk"/>
               <a:cs typeface="Space Grotesk"/>
@@ -6473,7 +6692,7 @@
   <p:cSld>
     <p:spTree>
       <p:nvGrpSpPr>
-        <p:cNvPr id="71" name="Shape 71"/>
+        <p:cNvPr id="1" name="Shape 71"/>
         <p:cNvGrpSpPr/>
         <p:nvPr/>
       </p:nvGrpSpPr>
@@ -6521,6 +6740,7 @@
               </a:spcAft>
               <a:buNone/>
             </a:pPr>
+            <a:endParaRPr/>
           </a:p>
         </p:txBody>
       </p:sp>
@@ -6566,51 +6786,7 @@
               </a:spcAft>
               <a:buNone/>
             </a:pPr>
-          </a:p>
-        </p:txBody>
-      </p:sp>
-      <p:sp>
-        <p:nvSpPr>
-          <p:cNvPr id="74" name="Google Shape;74;p15"/>
-          <p:cNvSpPr/>
-          <p:nvPr/>
-        </p:nvSpPr>
-        <p:spPr>
-          <a:xfrm>
-            <a:off x="0" y="4762500"/>
-            <a:ext cx="9144000" cy="381000"/>
-          </a:xfrm>
-          <a:prstGeom prst="rect">
-            <a:avLst/>
-          </a:prstGeom>
-          <a:solidFill>
-            <a:srgbClr val="FFDE59"/>
-          </a:solidFill>
-          <a:ln w="38100" cap="flat" cmpd="sng">
-            <a:solidFill>
-              <a:srgbClr val="111111"/>
-            </a:solidFill>
-            <a:prstDash val="solid"/>
-            <a:round/>
-            <a:headEnd type="none" w="sm" len="sm"/>
-            <a:tailEnd type="none" w="sm" len="sm"/>
-          </a:ln>
-        </p:spPr>
-        <p:txBody>
-          <a:bodyPr spcFirstLastPara="1" wrap="square" lIns="0" tIns="0" rIns="0" bIns="0" anchor="ctr" anchorCtr="0">
-            <a:noAutofit/>
-          </a:bodyPr>
-          <a:lstStyle/>
-          <a:p>
-            <a:pPr marL="0" lvl="0" indent="0" algn="l" rtl="0">
-              <a:spcBef>
-                <a:spcPts val="0"/>
-              </a:spcBef>
-              <a:spcAft>
-                <a:spcPts val="0"/>
-              </a:spcAft>
-              <a:buNone/>
-            </a:pPr>
+            <a:endParaRPr/>
           </a:p>
         </p:txBody>
       </p:sp>
@@ -6622,7 +6798,7 @@
         </p:nvSpPr>
         <p:spPr>
           <a:xfrm>
-            <a:off x="0" y="0"/>
+            <a:off x="0" y="-28575"/>
             <a:ext cx="9144000" cy="5143500"/>
           </a:xfrm>
           <a:prstGeom prst="rect">
@@ -6658,6 +6834,7 @@
               </a:spcAft>
               <a:buNone/>
             </a:pPr>
+            <a:endParaRPr dirty="0"/>
           </a:p>
         </p:txBody>
       </p:sp>
@@ -6669,7 +6846,7 @@
         </p:nvSpPr>
         <p:spPr>
           <a:xfrm>
-            <a:off x="381000" y="190500"/>
+            <a:off x="381000" y="288473"/>
             <a:ext cx="8382000" cy="571500"/>
           </a:xfrm>
           <a:prstGeom prst="rect">
@@ -6696,7 +6873,7 @@
               <a:buNone/>
             </a:pPr>
             <a:r>
-              <a:rPr lang="en-GB" sz="2400" b="1">
+              <a:rPr lang="en-GB" sz="2400" b="1" dirty="0">
                 <a:solidFill>
                   <a:srgbClr val="111111"/>
                 </a:solidFill>
@@ -6705,17 +6882,8 @@
                 <a:cs typeface="Space Grotesk"/>
                 <a:sym typeface="Space Grotesk"/>
               </a:rPr>
-              <a:t>CALCULATING THE "TYPICAL" BUDGET</a:t>
+              <a:t>CALCULATING “AVERAGE” POCKET MONEY</a:t>
             </a:r>
-            <a:endParaRPr lang="en-GB" sz="2400" b="1">
-              <a:solidFill>
-                <a:srgbClr val="111111"/>
-              </a:solidFill>
-              <a:latin typeface="Space Grotesk"/>
-              <a:ea typeface="Space Grotesk"/>
-              <a:cs typeface="Space Grotesk"/>
-              <a:sym typeface="Space Grotesk"/>
-            </a:endParaRPr>
           </a:p>
         </p:txBody>
       </p:sp>
@@ -6785,6 +6953,7 @@
                   </a:spcAft>
                   <a:buNone/>
                 </a:pPr>
+                <a:endParaRPr sz="2400"/>
               </a:p>
             </p:txBody>
           </p:sp>
@@ -6832,6 +7001,7 @@
                   </a:spcAft>
                   <a:buNone/>
                 </a:pPr>
+                <a:endParaRPr sz="2400"/>
               </a:p>
             </p:txBody>
           </p:sp>
@@ -6891,6 +7061,7 @@
                     </a:spcAft>
                     <a:buNone/>
                   </a:pPr>
+                  <a:endParaRPr sz="2400"/>
                 </a:p>
               </p:txBody>
             </p:sp>
@@ -6953,6 +7124,7 @@
                     </a:spcAft>
                     <a:buNone/>
                   </a:pPr>
+                  <a:endParaRPr sz="2400"/>
                 </a:p>
               </p:txBody>
             </p:sp>
@@ -6993,7 +7165,7 @@
                 <a:buNone/>
               </a:pPr>
               <a:r>
-                <a:rPr lang="en-GB" sz="1045" b="1">
+                <a:rPr lang="en-GB" b="1" dirty="0">
                   <a:solidFill>
                     <a:srgbClr val="111111"/>
                   </a:solidFill>
@@ -7004,7 +7176,7 @@
                 </a:rPr>
                 <a:t>Karthik</a:t>
               </a:r>
-              <a:endParaRPr sz="1045" b="1">
+              <a:endParaRPr b="1" dirty="0">
                 <a:solidFill>
                   <a:srgbClr val="111111"/>
                 </a:solidFill>
@@ -7025,7 +7197,7 @@
                 <a:buNone/>
               </a:pPr>
               <a:r>
-                <a:rPr lang="en-GB" sz="1165" b="1">
+                <a:rPr lang="en-GB" sz="1800" b="1" dirty="0">
                   <a:solidFill>
                     <a:srgbClr val="00BF63"/>
                   </a:solidFill>
@@ -7036,7 +7208,7 @@
                 </a:rPr>
                 <a:t>₹2,000</a:t>
               </a:r>
-              <a:endParaRPr sz="1165" b="1">
+              <a:endParaRPr sz="1800" b="1" dirty="0">
                 <a:solidFill>
                   <a:srgbClr val="00BF63"/>
                 </a:solidFill>
@@ -7115,6 +7287,7 @@
                   </a:spcAft>
                   <a:buNone/>
                 </a:pPr>
+                <a:endParaRPr sz="2400"/>
               </a:p>
             </p:txBody>
           </p:sp>
@@ -7162,6 +7335,7 @@
                   </a:spcAft>
                   <a:buNone/>
                 </a:pPr>
+                <a:endParaRPr sz="2400"/>
               </a:p>
             </p:txBody>
           </p:sp>
@@ -7221,6 +7395,7 @@
                     </a:spcAft>
                     <a:buNone/>
                   </a:pPr>
+                  <a:endParaRPr sz="2400"/>
                 </a:p>
               </p:txBody>
             </p:sp>
@@ -7283,6 +7458,7 @@
                     </a:spcAft>
                     <a:buNone/>
                   </a:pPr>
+                  <a:endParaRPr sz="2400"/>
                 </a:p>
               </p:txBody>
             </p:sp>
@@ -7323,7 +7499,7 @@
                 <a:buNone/>
               </a:pPr>
               <a:r>
-                <a:rPr lang="en-GB" sz="1045" b="1">
+                <a:rPr lang="en-GB" b="1" dirty="0">
                   <a:solidFill>
                     <a:srgbClr val="111111"/>
                   </a:solidFill>
@@ -7334,7 +7510,7 @@
                 </a:rPr>
                 <a:t>Ramya</a:t>
               </a:r>
-              <a:endParaRPr sz="1045" b="1">
+              <a:endParaRPr b="1" dirty="0">
                 <a:solidFill>
                   <a:srgbClr val="111111"/>
                 </a:solidFill>
@@ -7355,7 +7531,7 @@
                 <a:buNone/>
               </a:pPr>
               <a:r>
-                <a:rPr lang="en-GB" sz="1165" b="1">
+                <a:rPr lang="en-GB" sz="1800" b="1" dirty="0">
                   <a:solidFill>
                     <a:srgbClr val="00BF63"/>
                   </a:solidFill>
@@ -7366,7 +7542,7 @@
                 </a:rPr>
                 <a:t>₹3,000</a:t>
               </a:r>
-              <a:endParaRPr sz="1165" b="1">
+              <a:endParaRPr sz="1800" b="1" dirty="0">
                 <a:solidFill>
                   <a:srgbClr val="00BF63"/>
                 </a:solidFill>
@@ -7445,6 +7621,7 @@
                   </a:spcAft>
                   <a:buNone/>
                 </a:pPr>
+                <a:endParaRPr sz="2400"/>
               </a:p>
             </p:txBody>
           </p:sp>
@@ -7492,6 +7669,7 @@
                   </a:spcAft>
                   <a:buNone/>
                 </a:pPr>
+                <a:endParaRPr sz="2400"/>
               </a:p>
             </p:txBody>
           </p:sp>
@@ -7551,6 +7729,7 @@
                     </a:spcAft>
                     <a:buNone/>
                   </a:pPr>
+                  <a:endParaRPr sz="2400"/>
                 </a:p>
               </p:txBody>
             </p:sp>
@@ -7613,6 +7792,7 @@
                     </a:spcAft>
                     <a:buNone/>
                   </a:pPr>
+                  <a:endParaRPr sz="2400"/>
                 </a:p>
               </p:txBody>
             </p:sp>
@@ -7653,7 +7833,7 @@
                 <a:buNone/>
               </a:pPr>
               <a:r>
-                <a:rPr lang="en-GB" sz="1045" b="1">
+                <a:rPr lang="en-GB" b="1">
                   <a:solidFill>
                     <a:srgbClr val="111111"/>
                   </a:solidFill>
@@ -7664,7 +7844,7 @@
                 </a:rPr>
                 <a:t>Imran</a:t>
               </a:r>
-              <a:endParaRPr sz="1045" b="1">
+              <a:endParaRPr b="1">
                 <a:solidFill>
                   <a:srgbClr val="111111"/>
                 </a:solidFill>
@@ -7685,7 +7865,7 @@
                 <a:buNone/>
               </a:pPr>
               <a:r>
-                <a:rPr lang="en-GB" sz="1165" b="1">
+                <a:rPr lang="en-GB" sz="1800" b="1">
                   <a:solidFill>
                     <a:srgbClr val="00BF63"/>
                   </a:solidFill>
@@ -7696,7 +7876,7 @@
                 </a:rPr>
                 <a:t>₹3,500</a:t>
               </a:r>
-              <a:endParaRPr sz="1165" b="1">
+              <a:endParaRPr sz="1800" b="1">
                 <a:solidFill>
                   <a:srgbClr val="00BF63"/>
                 </a:solidFill>
@@ -7775,6 +7955,7 @@
                   </a:spcAft>
                   <a:buNone/>
                 </a:pPr>
+                <a:endParaRPr sz="2400"/>
               </a:p>
             </p:txBody>
           </p:sp>
@@ -7822,6 +8003,7 @@
                   </a:spcAft>
                   <a:buNone/>
                 </a:pPr>
+                <a:endParaRPr sz="2400"/>
               </a:p>
             </p:txBody>
           </p:sp>
@@ -7881,6 +8063,7 @@
                     </a:spcAft>
                     <a:buNone/>
                   </a:pPr>
+                  <a:endParaRPr sz="2400"/>
                 </a:p>
               </p:txBody>
             </p:sp>
@@ -7943,6 +8126,7 @@
                     </a:spcAft>
                     <a:buNone/>
                   </a:pPr>
+                  <a:endParaRPr sz="2400"/>
                 </a:p>
               </p:txBody>
             </p:sp>
@@ -7983,7 +8167,7 @@
                 <a:buNone/>
               </a:pPr>
               <a:r>
-                <a:rPr lang="en-GB" sz="1045" b="1">
+                <a:rPr lang="en-GB" b="1">
                   <a:solidFill>
                     <a:srgbClr val="111111"/>
                   </a:solidFill>
@@ -7994,7 +8178,7 @@
                 </a:rPr>
                 <a:t>Deepa</a:t>
               </a:r>
-              <a:endParaRPr sz="1045" b="1">
+              <a:endParaRPr b="1">
                 <a:solidFill>
                   <a:srgbClr val="111111"/>
                 </a:solidFill>
@@ -8015,7 +8199,7 @@
                 <a:buNone/>
               </a:pPr>
               <a:r>
-                <a:rPr lang="en-GB" sz="1165" b="1">
+                <a:rPr lang="en-GB" sz="1800" b="1">
                   <a:solidFill>
                     <a:srgbClr val="00BF63"/>
                   </a:solidFill>
@@ -8026,7 +8210,7 @@
                 </a:rPr>
                 <a:t>₹4,000</a:t>
               </a:r>
-              <a:endParaRPr sz="1165" b="1">
+              <a:endParaRPr sz="1800" b="1">
                 <a:solidFill>
                   <a:srgbClr val="00BF63"/>
                 </a:solidFill>
@@ -8105,6 +8289,7 @@
                   </a:spcAft>
                   <a:buNone/>
                 </a:pPr>
+                <a:endParaRPr sz="2400"/>
               </a:p>
             </p:txBody>
           </p:sp>
@@ -8152,6 +8337,7 @@
                   </a:spcAft>
                   <a:buNone/>
                 </a:pPr>
+                <a:endParaRPr sz="2400"/>
               </a:p>
             </p:txBody>
           </p:sp>
@@ -8211,6 +8397,7 @@
                     </a:spcAft>
                     <a:buNone/>
                   </a:pPr>
+                  <a:endParaRPr sz="2400"/>
                 </a:p>
               </p:txBody>
             </p:sp>
@@ -8273,6 +8460,7 @@
                     </a:spcAft>
                     <a:buNone/>
                   </a:pPr>
+                  <a:endParaRPr sz="2400"/>
                 </a:p>
               </p:txBody>
             </p:sp>
@@ -8313,7 +8501,7 @@
                 <a:buNone/>
               </a:pPr>
               <a:r>
-                <a:rPr lang="en-GB" sz="1045" b="1">
+                <a:rPr lang="en-GB" b="1">
                   <a:solidFill>
                     <a:srgbClr val="111111"/>
                   </a:solidFill>
@@ -8324,7 +8512,7 @@
                 </a:rPr>
                 <a:t>Rohit</a:t>
               </a:r>
-              <a:endParaRPr sz="1045" b="1">
+              <a:endParaRPr b="1">
                 <a:solidFill>
                   <a:srgbClr val="111111"/>
                 </a:solidFill>
@@ -8345,7 +8533,7 @@
                 <a:buNone/>
               </a:pPr>
               <a:r>
-                <a:rPr lang="en-GB" sz="1165" b="1">
+                <a:rPr lang="en-GB" sz="1800" b="1">
                   <a:solidFill>
                     <a:srgbClr val="00BF63"/>
                   </a:solidFill>
@@ -8356,7 +8544,7 @@
                 </a:rPr>
                 <a:t>₹5,000</a:t>
               </a:r>
-              <a:endParaRPr sz="1165" b="1">
+              <a:endParaRPr sz="1800" b="1">
                 <a:solidFill>
                   <a:srgbClr val="00BF63"/>
                 </a:solidFill>
@@ -8378,7 +8566,7 @@
         <p:grpSpPr>
           <a:xfrm>
             <a:off x="2936558" y="1126807"/>
-            <a:ext cx="5732145" cy="874395"/>
+            <a:ext cx="5732145" cy="618499"/>
             <a:chOff x="-19050" y="-19050"/>
             <a:chExt cx="6743700" cy="1028700"/>
           </a:xfrm>
@@ -8435,6 +8623,7 @@
                   </a:spcAft>
                   <a:buNone/>
                 </a:pPr>
+                <a:endParaRPr/>
               </a:p>
             </p:txBody>
           </p:sp>
@@ -8445,7 +8634,7 @@
               <p:nvPr/>
             </p:nvPicPr>
             <p:blipFill rotWithShape="1">
-              <a:blip r:embed="rId1"/>
+              <a:blip r:embed="rId3"/>
               <a:srcRect/>
               <a:stretch>
                 <a:fillRect/>
@@ -8501,7 +8690,7 @@
                 <a:buNone/>
               </a:pPr>
               <a:r>
-                <a:rPr lang="en-GB" sz="1800" b="1">
+                <a:rPr lang="en-GB" sz="1800" b="1" dirty="0">
                   <a:solidFill>
                     <a:srgbClr val="111111"/>
                   </a:solidFill>
@@ -8512,15 +8701,6 @@
                 </a:rPr>
                 <a:t>SUM OF VALUES ÷ NUMBER OF VALUES = MEAN</a:t>
               </a:r>
-              <a:endParaRPr lang="en-GB" sz="1800" b="1">
-                <a:solidFill>
-                  <a:srgbClr val="111111"/>
-                </a:solidFill>
-                <a:latin typeface="Space Grotesk"/>
-                <a:ea typeface="Space Grotesk"/>
-                <a:cs typeface="Space Grotesk"/>
-                <a:sym typeface="Space Grotesk"/>
-              </a:endParaRPr>
             </a:p>
           </p:txBody>
         </p:sp>
@@ -8533,7 +8713,7 @@
         </p:nvGrpSpPr>
         <p:grpSpPr>
           <a:xfrm>
-            <a:off x="2952750" y="2095500"/>
+            <a:off x="2952750" y="1939089"/>
             <a:ext cx="3581550" cy="1486050"/>
             <a:chOff x="0" y="0"/>
             <a:chExt cx="3581550" cy="1486050"/>
@@ -8577,6 +8757,7 @@
                 </a:spcAft>
                 <a:buNone/>
               </a:pPr>
+              <a:endParaRPr sz="2000"/>
             </a:p>
           </p:txBody>
         </p:sp>
@@ -8624,6 +8805,7 @@
                 </a:spcAft>
                 <a:buNone/>
               </a:pPr>
+              <a:endParaRPr sz="2000"/>
             </a:p>
           </p:txBody>
         </p:sp>
@@ -8662,7 +8844,7 @@
                 <a:buNone/>
               </a:pPr>
               <a:r>
-                <a:rPr lang="en-GB" sz="1200" b="1">
+                <a:rPr lang="en-GB" sz="1800" b="1" dirty="0">
                   <a:solidFill>
                     <a:srgbClr val="FF66C4"/>
                   </a:solidFill>
@@ -8673,7 +8855,7 @@
                 </a:rPr>
                 <a:t>Step-by-Step Calculation</a:t>
               </a:r>
-              <a:endParaRPr sz="1200" b="1">
+              <a:endParaRPr sz="1800" b="1" dirty="0">
                 <a:solidFill>
                   <a:srgbClr val="FF66C4"/>
                 </a:solidFill>
@@ -8686,7 +8868,7 @@
             <a:p>
               <a:pPr marL="0" lvl="0" indent="0" algn="l" rtl="0">
                 <a:spcBef>
-                  <a:spcPts val="600"/>
+                  <a:spcPts val="450"/>
                 </a:spcBef>
                 <a:spcAft>
                   <a:spcPts val="0"/>
@@ -8694,7 +8876,7 @@
                 <a:buNone/>
               </a:pPr>
               <a:r>
-                <a:rPr lang="en-GB" sz="1125" b="1">
+                <a:rPr lang="en-GB" sz="1600" b="1" dirty="0">
                   <a:solidFill>
                     <a:srgbClr val="111111"/>
                   </a:solidFill>
@@ -8703,9 +8885,9 @@
                   <a:cs typeface="Outfit"/>
                   <a:sym typeface="Outfit"/>
                 </a:rPr>
-                <a:t>(₹2,000 + ₹3,000 + ₹3,500 + ₹4,000 + ₹5,000) ÷ 5</a:t>
+                <a:t>= ₹17,500 ÷ 5</a:t>
               </a:r>
-              <a:endParaRPr sz="1125" b="1">
+              <a:endParaRPr sz="1600" b="1" dirty="0">
                 <a:solidFill>
                   <a:srgbClr val="111111"/>
                 </a:solidFill>
@@ -8726,39 +8908,7 @@
                 <a:buNone/>
               </a:pPr>
               <a:r>
-                <a:rPr lang="en-GB" sz="1125" b="1">
-                  <a:solidFill>
-                    <a:srgbClr val="111111"/>
-                  </a:solidFill>
-                  <a:latin typeface="Outfit"/>
-                  <a:ea typeface="Outfit"/>
-                  <a:cs typeface="Outfit"/>
-                  <a:sym typeface="Outfit"/>
-                </a:rPr>
-                <a:t>= ₹17,500 ÷ 5</a:t>
-              </a:r>
-              <a:endParaRPr sz="1125" b="1">
-                <a:solidFill>
-                  <a:srgbClr val="111111"/>
-                </a:solidFill>
-                <a:latin typeface="Outfit"/>
-                <a:ea typeface="Outfit"/>
-                <a:cs typeface="Outfit"/>
-                <a:sym typeface="Outfit"/>
-              </a:endParaRPr>
-            </a:p>
-            <a:p>
-              <a:pPr marL="0" lvl="0" indent="0" algn="l" rtl="0">
-                <a:spcBef>
-                  <a:spcPts val="450"/>
-                </a:spcBef>
-                <a:spcAft>
-                  <a:spcPts val="0"/>
-                </a:spcAft>
-                <a:buNone/>
-              </a:pPr>
-              <a:r>
-                <a:rPr lang="en-GB" sz="1125" b="1">
+                <a:rPr lang="en-GB" sz="1600" b="1" dirty="0">
                   <a:solidFill>
                     <a:srgbClr val="00BF63"/>
                   </a:solidFill>
@@ -8769,7 +8919,7 @@
                 </a:rPr>
                 <a:t>= ₹3,500</a:t>
               </a:r>
-              <a:endParaRPr sz="1125" b="1">
+              <a:endParaRPr sz="1600" b="1" dirty="0">
                 <a:solidFill>
                   <a:srgbClr val="00BF63"/>
                 </a:solidFill>
@@ -8790,7 +8940,7 @@
         </p:nvGrpSpPr>
         <p:grpSpPr>
           <a:xfrm>
-            <a:off x="6619875" y="1888331"/>
+            <a:off x="6619875" y="1731920"/>
             <a:ext cx="2057250" cy="1693219"/>
             <a:chOff x="0" y="-207169"/>
             <a:chExt cx="2057250" cy="1693219"/>
@@ -8834,6 +8984,7 @@
                 </a:spcAft>
                 <a:buNone/>
               </a:pPr>
+              <a:endParaRPr/>
             </a:p>
           </p:txBody>
         </p:sp>
@@ -8881,6 +9032,7 @@
                 </a:spcAft>
                 <a:buNone/>
               </a:pPr>
+              <a:endParaRPr/>
             </a:p>
           </p:txBody>
         </p:sp>
@@ -8973,6 +9125,7 @@
                   </a:spcAft>
                   <a:buNone/>
                 </a:pPr>
+                <a:endParaRPr/>
               </a:p>
             </p:txBody>
           </p:sp>
@@ -9057,6 +9210,7 @@
                   </a:spcAft>
                   <a:buNone/>
                 </a:pPr>
+                <a:endParaRPr/>
               </a:p>
             </p:txBody>
           </p:sp>
@@ -9096,7 +9250,7 @@
                 <a:buNone/>
               </a:pPr>
               <a:r>
-                <a:rPr lang="en-GB" sz="1350" b="1">
+                <a:rPr lang="en-GB" sz="1350" b="1" dirty="0">
                   <a:solidFill>
                     <a:srgbClr val="111111"/>
                   </a:solidFill>
@@ -9107,7 +9261,7 @@
                 </a:rPr>
                 <a:t>CALCULATED MEAN</a:t>
               </a:r>
-              <a:endParaRPr sz="1350" b="1">
+              <a:endParaRPr sz="1350" b="1" dirty="0">
                 <a:solidFill>
                   <a:srgbClr val="111111"/>
                 </a:solidFill>
@@ -9128,7 +9282,7 @@
                 <a:buNone/>
               </a:pPr>
               <a:r>
-                <a:rPr lang="en-GB" sz="2850" b="1">
+                <a:rPr lang="en-GB" sz="2850" b="1" dirty="0">
                   <a:solidFill>
                     <a:srgbClr val="111111"/>
                   </a:solidFill>
@@ -9139,7 +9293,7 @@
                 </a:rPr>
                 <a:t>₹3,500</a:t>
               </a:r>
-              <a:endParaRPr sz="2850" b="1">
+              <a:endParaRPr sz="2850" b="1" dirty="0">
                 <a:solidFill>
                   <a:srgbClr val="111111"/>
                 </a:solidFill>
@@ -9160,8 +9314,8 @@
         </p:nvGrpSpPr>
         <p:grpSpPr>
           <a:xfrm>
-            <a:off x="2952750" y="3714750"/>
-            <a:ext cx="5724450" cy="914550"/>
+            <a:off x="2963493" y="3694421"/>
+            <a:ext cx="5724450" cy="1174834"/>
             <a:chOff x="0" y="0"/>
             <a:chExt cx="5724450" cy="914550"/>
           </a:xfrm>
@@ -9204,6 +9358,7 @@
                 </a:spcAft>
                 <a:buNone/>
               </a:pPr>
+              <a:endParaRPr sz="1800"/>
             </a:p>
           </p:txBody>
         </p:sp>
@@ -9251,6 +9406,7 @@
                 </a:spcAft>
                 <a:buNone/>
               </a:pPr>
+              <a:endParaRPr sz="1800"/>
             </a:p>
           </p:txBody>
         </p:sp>
@@ -9262,7 +9418,7 @@
           </p:nvSpPr>
           <p:spPr>
             <a:xfrm>
-              <a:off x="190500" y="142875"/>
+              <a:off x="190500" y="136518"/>
               <a:ext cx="5286300" cy="571500"/>
             </a:xfrm>
             <a:prstGeom prst="rect">
@@ -9289,7 +9445,7 @@
                 <a:buNone/>
               </a:pPr>
               <a:r>
-                <a:rPr lang="en-GB" sz="1200" b="1">
+                <a:rPr lang="en-GB" sz="1600" b="1" dirty="0">
                   <a:solidFill>
                     <a:srgbClr val="111111"/>
                   </a:solidFill>
@@ -9301,7 +9457,7 @@
                 <a:t>This </a:t>
               </a:r>
               <a:r>
-                <a:rPr lang="en-GB" sz="1350" b="1">
+                <a:rPr lang="en-GB" sz="1600" b="1" dirty="0">
                   <a:solidFill>
                     <a:srgbClr val="FF66C4"/>
                   </a:solidFill>
@@ -9310,10 +9466,10 @@
                   <a:cs typeface="Outfit"/>
                   <a:sym typeface="Outfit"/>
                 </a:rPr>
-                <a:t>₹3,500 average</a:t>
+                <a:t>₹3,500 </a:t>
               </a:r>
               <a:r>
-                <a:rPr lang="en-GB" sz="1200" b="1">
+                <a:rPr lang="en-GB" sz="1600" b="1" dirty="0">
                   <a:solidFill>
                     <a:srgbClr val="111111"/>
                   </a:solidFill>
@@ -9322,9 +9478,9 @@
                   <a:cs typeface="Outfit"/>
                   <a:sym typeface="Outfit"/>
                 </a:rPr>
-                <a:t> perfectly represents a "typical" monthly budget for this specific group of students.</a:t>
+                <a:t>perfectly represents a "typical" pocket money for this specific group of students.</a:t>
               </a:r>
-              <a:endParaRPr sz="1200" b="1">
+              <a:endParaRPr sz="1600" b="1" dirty="0">
                 <a:solidFill>
                   <a:srgbClr val="111111"/>
                 </a:solidFill>
@@ -9785,7 +9941,7 @@
   <p:cSld>
     <p:spTree>
       <p:nvGrpSpPr>
-        <p:cNvPr id="140" name="Shape 140"/>
+        <p:cNvPr id="1" name="Shape 140"/>
         <p:cNvGrpSpPr/>
         <p:nvPr/>
       </p:nvGrpSpPr>
@@ -9797,6 +9953,56 @@
           <a:chExt cx="0" cy="0"/>
         </a:xfrm>
       </p:grpSpPr>
+      <p:sp>
+        <p:nvSpPr>
+          <p:cNvPr id="146" name="Google Shape;146;p16"/>
+          <p:cNvSpPr/>
+          <p:nvPr/>
+        </p:nvSpPr>
+        <p:spPr>
+          <a:xfrm>
+            <a:off x="0" y="9525"/>
+            <a:ext cx="9144000" cy="5133974"/>
+          </a:xfrm>
+          <a:prstGeom prst="roundRect">
+            <a:avLst>
+              <a:gd name="adj" fmla="val 4000"/>
+            </a:avLst>
+          </a:prstGeom>
+          <a:solidFill>
+            <a:srgbClr val="000000">
+              <a:alpha val="0"/>
+            </a:srgbClr>
+          </a:solidFill>
+          <a:ln w="76200" cap="flat" cmpd="sng">
+            <a:solidFill>
+              <a:srgbClr val="111111"/>
+            </a:solidFill>
+            <a:prstDash val="solid"/>
+            <a:round/>
+            <a:headEnd type="none" w="sm" len="sm"/>
+            <a:tailEnd type="none" w="sm" len="sm"/>
+          </a:ln>
+        </p:spPr>
+        <p:txBody>
+          <a:bodyPr spcFirstLastPara="1" wrap="square" lIns="0" tIns="0" rIns="0" bIns="0" anchor="ctr" anchorCtr="0">
+            <a:noAutofit/>
+          </a:bodyPr>
+          <a:lstStyle/>
+          <a:p>
+            <a:pPr marL="0" lvl="0" indent="0" algn="l" rtl="0">
+              <a:spcBef>
+                <a:spcPts val="0"/>
+              </a:spcBef>
+              <a:spcAft>
+                <a:spcPts val="0"/>
+              </a:spcAft>
+              <a:buNone/>
+            </a:pPr>
+            <a:endParaRPr/>
+          </a:p>
+        </p:txBody>
+      </p:sp>
       <p:sp>
         <p:nvSpPr>
           <p:cNvPr id="141" name="Google Shape;141;p16"/>
@@ -9812,7 +10018,7 @@
             <a:avLst/>
           </a:prstGeom>
           <a:solidFill>
-            <a:srgbClr val="FF66C4"/>
+            <a:schemeClr val="bg1"/>
           </a:solidFill>
           <a:ln>
             <a:noFill/>
@@ -9833,36 +10039,10 @@
               </a:spcAft>
               <a:buNone/>
             </a:pPr>
+            <a:endParaRPr/>
           </a:p>
         </p:txBody>
       </p:sp>
-      <p:pic>
-        <p:nvPicPr>
-          <p:cNvPr id="142" name="Google Shape;142;p16"/>
-          <p:cNvPicPr preferRelativeResize="0"/>
-          <p:nvPr/>
-        </p:nvPicPr>
-        <p:blipFill rotWithShape="1">
-          <a:blip r:embed="rId1"/>
-          <a:srcRect/>
-          <a:stretch>
-            <a:fillRect/>
-          </a:stretch>
-        </p:blipFill>
-        <p:spPr>
-          <a:xfrm>
-            <a:off x="-962025" y="-966787"/>
-            <a:ext cx="10106100" cy="6110400"/>
-          </a:xfrm>
-          <a:prstGeom prst="rect">
-            <a:avLst/>
-          </a:prstGeom>
-          <a:noFill/>
-          <a:ln>
-            <a:noFill/>
-          </a:ln>
-        </p:spPr>
-      </p:pic>
       <p:grpSp>
         <p:nvGrpSpPr>
           <p:cNvPr id="143" name="Google Shape;143;p16"/>
@@ -9871,7 +10051,7 @@
         </p:nvGrpSpPr>
         <p:grpSpPr>
           <a:xfrm>
-            <a:off x="7762875" y="4191000"/>
+            <a:off x="7539037" y="4074501"/>
             <a:ext cx="1228725" cy="942975"/>
             <a:chOff x="95250" y="190500"/>
             <a:chExt cx="819150" cy="628650"/>
@@ -9943,6 +10123,7 @@
                 </a:spcAft>
                 <a:buNone/>
               </a:pPr>
+              <a:endParaRPr/>
             </a:p>
           </p:txBody>
         </p:sp>
@@ -10018,59 +10199,11 @@
                 </a:spcAft>
                 <a:buNone/>
               </a:pPr>
+              <a:endParaRPr/>
             </a:p>
           </p:txBody>
         </p:sp>
       </p:grpSp>
-      <p:sp>
-        <p:nvSpPr>
-          <p:cNvPr id="146" name="Google Shape;146;p16"/>
-          <p:cNvSpPr/>
-          <p:nvPr/>
-        </p:nvSpPr>
-        <p:spPr>
-          <a:xfrm>
-            <a:off x="190500" y="190500"/>
-            <a:ext cx="8763000" cy="4762500"/>
-          </a:xfrm>
-          <a:prstGeom prst="roundRect">
-            <a:avLst>
-              <a:gd name="adj" fmla="val 4000"/>
-            </a:avLst>
-          </a:prstGeom>
-          <a:solidFill>
-            <a:srgbClr val="000000">
-              <a:alpha val="0"/>
-            </a:srgbClr>
-          </a:solidFill>
-          <a:ln w="76200" cap="flat" cmpd="sng">
-            <a:solidFill>
-              <a:srgbClr val="111111"/>
-            </a:solidFill>
-            <a:prstDash val="solid"/>
-            <a:round/>
-            <a:headEnd type="none" w="sm" len="sm"/>
-            <a:tailEnd type="none" w="sm" len="sm"/>
-          </a:ln>
-        </p:spPr>
-        <p:txBody>
-          <a:bodyPr spcFirstLastPara="1" wrap="square" lIns="0" tIns="0" rIns="0" bIns="0" anchor="ctr" anchorCtr="0">
-            <a:noAutofit/>
-          </a:bodyPr>
-          <a:lstStyle/>
-          <a:p>
-            <a:pPr marL="0" lvl="0" indent="0" algn="l" rtl="0">
-              <a:spcBef>
-                <a:spcPts val="0"/>
-              </a:spcBef>
-              <a:spcAft>
-                <a:spcPts val="0"/>
-              </a:spcAft>
-              <a:buNone/>
-            </a:pPr>
-          </a:p>
-        </p:txBody>
-      </p:sp>
       <p:grpSp>
         <p:nvGrpSpPr>
           <p:cNvPr id="147" name="Google Shape;147;p16"/>
@@ -10080,7 +10213,7 @@
         <p:grpSpPr>
           <a:xfrm>
             <a:off x="1524000" y="276225"/>
-            <a:ext cx="3886200" cy="2133600"/>
+            <a:ext cx="3886200" cy="1866900"/>
             <a:chOff x="0" y="-152400"/>
             <a:chExt cx="3886200" cy="2133600"/>
           </a:xfrm>
@@ -10123,6 +10256,7 @@
                 </a:spcAft>
                 <a:buNone/>
               </a:pPr>
+              <a:endParaRPr/>
             </a:p>
           </p:txBody>
         </p:sp>
@@ -10170,6 +10304,7 @@
                 </a:spcAft>
                 <a:buNone/>
               </a:pPr>
+              <a:endParaRPr/>
             </a:p>
           </p:txBody>
         </p:sp>
@@ -10262,6 +10397,7 @@
                   </a:spcAft>
                   <a:buNone/>
                 </a:pPr>
+                <a:endParaRPr/>
               </a:p>
             </p:txBody>
           </p:sp>
@@ -10346,6 +10482,7 @@
                   </a:spcAft>
                   <a:buNone/>
                 </a:pPr>
+                <a:endParaRPr/>
               </a:p>
             </p:txBody>
           </p:sp>
@@ -10385,7 +10522,7 @@
                 <a:buNone/>
               </a:pPr>
               <a:r>
-                <a:rPr lang="en-GB" sz="1650" b="1">
+                <a:rPr lang="en-GB" sz="1650" b="1" dirty="0">
                   <a:solidFill>
                     <a:srgbClr val="111111"/>
                   </a:solidFill>
@@ -10394,9 +10531,9 @@
                   <a:cs typeface="Space Grotesk"/>
                   <a:sym typeface="Space Grotesk"/>
                 </a:rPr>
-                <a:t>TYCOON'S SON</a:t>
+                <a:t>BILLIONAIRE’S SON</a:t>
               </a:r>
-              <a:endParaRPr sz="1650" b="1">
+              <a:endParaRPr sz="1650" b="1" dirty="0">
                 <a:solidFill>
                   <a:srgbClr val="111111"/>
                 </a:solidFill>
@@ -10417,7 +10554,7 @@
                 <a:buNone/>
               </a:pPr>
               <a:r>
-                <a:rPr lang="en-GB" sz="3600" b="1">
+                <a:rPr lang="en-GB" sz="3600" b="1" dirty="0">
                   <a:solidFill>
                     <a:srgbClr val="111111"/>
                   </a:solidFill>
@@ -10428,7 +10565,7 @@
                 </a:rPr>
                 <a:t>₹42,500</a:t>
               </a:r>
-              <a:endParaRPr sz="3600" b="1">
+              <a:endParaRPr sz="3600" b="1" dirty="0">
                 <a:solidFill>
                   <a:srgbClr val="111111"/>
                 </a:solidFill>
@@ -10449,7 +10586,7 @@
                 <a:buNone/>
               </a:pPr>
               <a:r>
-                <a:rPr lang="en-GB" sz="1050" b="1">
+                <a:rPr lang="en-GB" sz="1050" b="1" dirty="0">
                   <a:solidFill>
                     <a:srgbClr val="111111"/>
                   </a:solidFill>
@@ -10460,7 +10597,7 @@
                 </a:rPr>
                 <a:t>MONTHLY POCKET MONEY</a:t>
               </a:r>
-              <a:endParaRPr sz="1050" b="1">
+              <a:endParaRPr sz="1050" b="1" dirty="0">
                 <a:solidFill>
                   <a:srgbClr val="111111"/>
                 </a:solidFill>
@@ -10482,7 +10619,7 @@
         <p:grpSpPr>
           <a:xfrm>
             <a:off x="5715000" y="428625"/>
-            <a:ext cx="1981200" cy="1981200"/>
+            <a:ext cx="1981200" cy="1666875"/>
             <a:chOff x="0" y="0"/>
             <a:chExt cx="1981200" cy="1981200"/>
           </a:xfrm>
@@ -10525,6 +10662,7 @@
                 </a:spcAft>
                 <a:buNone/>
               </a:pPr>
+              <a:endParaRPr/>
             </a:p>
           </p:txBody>
         </p:sp>
@@ -10572,6 +10710,7 @@
                 </a:spcAft>
                 <a:buNone/>
               </a:pPr>
+              <a:endParaRPr/>
             </a:p>
           </p:txBody>
         </p:sp>
@@ -10582,7 +10721,7 @@
             <p:nvPr/>
           </p:nvPicPr>
           <p:blipFill rotWithShape="1">
-            <a:blip r:embed="rId2"/>
+            <a:blip r:embed="rId3"/>
             <a:srcRect l="2999" t="2999" r="2999" b="2999"/>
             <a:stretch>
               <a:fillRect/>
@@ -10657,6 +10796,7 @@
                 </a:spcAft>
                 <a:buNone/>
               </a:pPr>
+              <a:endParaRPr/>
             </a:p>
           </p:txBody>
         </p:sp>
@@ -10704,6 +10844,7 @@
                 </a:spcAft>
                 <a:buNone/>
               </a:pPr>
+              <a:endParaRPr/>
             </a:p>
           </p:txBody>
         </p:sp>
@@ -10742,7 +10883,7 @@
                 <a:buNone/>
               </a:pPr>
               <a:r>
-                <a:rPr lang="en-GB" sz="1500" b="1">
+                <a:rPr lang="en-GB" sz="1500" b="1" dirty="0">
                   <a:solidFill>
                     <a:srgbClr val="111111"/>
                   </a:solidFill>
@@ -10753,7 +10894,7 @@
                 </a:rPr>
                 <a:t>OLD MEAN</a:t>
               </a:r>
-              <a:endParaRPr sz="1500" b="1">
+              <a:endParaRPr sz="1500" b="1" dirty="0">
                 <a:solidFill>
                   <a:srgbClr val="111111"/>
                 </a:solidFill>
@@ -10774,7 +10915,7 @@
                 <a:buNone/>
               </a:pPr>
               <a:r>
-                <a:rPr lang="en-GB" sz="2700" b="1">
+                <a:rPr lang="en-GB" sz="2700" b="1" dirty="0">
                   <a:solidFill>
                     <a:srgbClr val="111111"/>
                   </a:solidFill>
@@ -10785,7 +10926,7 @@
                 </a:rPr>
                 <a:t>₹3,500</a:t>
               </a:r>
-              <a:endParaRPr sz="2700" b="1">
+              <a:endParaRPr sz="2700" b="1" dirty="0">
                 <a:solidFill>
                   <a:srgbClr val="111111"/>
                 </a:solidFill>
@@ -10806,7 +10947,7 @@
                 <a:buNone/>
               </a:pPr>
               <a:r>
-                <a:rPr lang="en-GB" sz="900" b="1">
+                <a:rPr lang="en-GB" sz="900" b="1" dirty="0">
                   <a:solidFill>
                     <a:srgbClr val="111111"/>
                   </a:solidFill>
@@ -10817,7 +10958,7 @@
                 </a:rPr>
                 <a:t>FOR 5 ORIGINAL STUDENTS</a:t>
               </a:r>
-              <a:endParaRPr sz="900" b="1">
+              <a:endParaRPr sz="900" b="1" dirty="0">
                 <a:solidFill>
                   <a:srgbClr val="111111"/>
                 </a:solidFill>
@@ -10867,6 +11008,7 @@
                 </a:spcAft>
                 <a:buNone/>
               </a:pPr>
+              <a:endParaRPr/>
             </a:p>
           </p:txBody>
         </p:sp>
@@ -10914,6 +11056,7 @@
                 </a:spcAft>
                 <a:buNone/>
               </a:pPr>
+              <a:endParaRPr/>
             </a:p>
           </p:txBody>
         </p:sp>
@@ -10952,7 +11095,7 @@
                 <a:buNone/>
               </a:pPr>
               <a:r>
-                <a:rPr lang="en-GB" sz="1500" b="1">
+                <a:rPr lang="en-GB" sz="1500" b="1" dirty="0">
                   <a:solidFill>
                     <a:srgbClr val="111111"/>
                   </a:solidFill>
@@ -10963,7 +11106,7 @@
                 </a:rPr>
                 <a:t>SKEWED MEAN</a:t>
               </a:r>
-              <a:endParaRPr sz="1500" b="1">
+              <a:endParaRPr sz="1500" b="1" dirty="0">
                 <a:solidFill>
                   <a:srgbClr val="111111"/>
                 </a:solidFill>
@@ -10984,7 +11127,7 @@
                 <a:buNone/>
               </a:pPr>
               <a:r>
-                <a:rPr lang="en-GB" sz="2700" b="1">
+                <a:rPr lang="en-GB" sz="2700" b="1" dirty="0">
                   <a:solidFill>
                     <a:srgbClr val="111111"/>
                   </a:solidFill>
@@ -10995,7 +11138,7 @@
                 </a:rPr>
                 <a:t>₹10,000</a:t>
               </a:r>
-              <a:endParaRPr sz="2700" b="1">
+              <a:endParaRPr sz="2700" b="1" dirty="0">
                 <a:solidFill>
                   <a:srgbClr val="111111"/>
                 </a:solidFill>
@@ -11016,7 +11159,7 @@
                 <a:buNone/>
               </a:pPr>
               <a:r>
-                <a:rPr lang="en-GB" sz="900" b="1">
+                <a:rPr lang="en-GB" sz="900" b="1" dirty="0">
                   <a:solidFill>
                     <a:srgbClr val="111111"/>
                   </a:solidFill>
@@ -11027,7 +11170,7 @@
                 </a:rPr>
                 <a:t>DISTORTED BY 1 OUTLIER</a:t>
               </a:r>
-              <a:endParaRPr sz="900" b="1">
+              <a:endParaRPr sz="900" b="1" dirty="0">
                 <a:solidFill>
                   <a:srgbClr val="111111"/>
                 </a:solidFill>
@@ -11075,6 +11218,7 @@
                 </a:spcAft>
                 <a:buNone/>
               </a:pPr>
+              <a:endParaRPr/>
             </a:p>
           </p:txBody>
         </p:sp>
@@ -11120,6 +11264,7 @@
                 </a:spcAft>
                 <a:buNone/>
               </a:pPr>
+              <a:endParaRPr/>
             </a:p>
           </p:txBody>
         </p:sp>
@@ -11169,15 +11314,6 @@
                 </a:rPr>
                 <a:t>VS</a:t>
               </a:r>
-              <a:endParaRPr lang="en-GB" sz="1800" b="1">
-                <a:solidFill>
-                  <a:srgbClr val="111111"/>
-                </a:solidFill>
-                <a:latin typeface="Space Grotesk"/>
-                <a:ea typeface="Space Grotesk"/>
-                <a:cs typeface="Space Grotesk"/>
-                <a:sym typeface="Space Grotesk"/>
-              </a:endParaRPr>
             </a:p>
           </p:txBody>
         </p:sp>
@@ -11234,6 +11370,7 @@
                 </a:spcAft>
                 <a:buNone/>
               </a:pPr>
+              <a:endParaRPr/>
             </a:p>
           </p:txBody>
         </p:sp>
@@ -11281,6 +11418,7 @@
                 </a:spcAft>
                 <a:buNone/>
               </a:pPr>
+              <a:endParaRPr/>
             </a:p>
           </p:txBody>
         </p:sp>
@@ -11330,15 +11468,6 @@
                 </a:rPr>
                 <a:t>"</a:t>
               </a:r>
-              <a:endParaRPr lang="en-GB" sz="3300" b="0">
-                <a:solidFill>
-                  <a:srgbClr val="111111"/>
-                </a:solidFill>
-                <a:latin typeface="Space Grotesk"/>
-                <a:ea typeface="Space Grotesk"/>
-                <a:cs typeface="Space Grotesk"/>
-                <a:sym typeface="Space Grotesk"/>
-              </a:endParaRPr>
             </a:p>
           </p:txBody>
         </p:sp>
@@ -11377,7 +11506,7 @@
                 <a:buNone/>
               </a:pPr>
               <a:r>
-                <a:rPr lang="en-GB" sz="1500" b="1" i="1">
+                <a:rPr lang="en-GB" sz="1500" b="1" i="1" dirty="0">
                   <a:solidFill>
                     <a:srgbClr val="111111"/>
                   </a:solidFill>
@@ -11388,7 +11517,7 @@
                 </a:rPr>
                 <a:t>"Does ₹10,000 represent a typical student here? Absolutely not."</a:t>
               </a:r>
-              <a:endParaRPr sz="1500" b="1" i="1">
+              <a:endParaRPr sz="1500" b="1" i="1" dirty="0">
                 <a:solidFill>
                   <a:srgbClr val="111111"/>
                 </a:solidFill>
@@ -11409,7 +11538,7 @@
                 <a:buNone/>
               </a:pPr>
               <a:r>
-                <a:rPr lang="en-GB" sz="1050" b="1">
+                <a:rPr lang="en-GB" sz="1050" b="1" dirty="0">
                   <a:solidFill>
                     <a:srgbClr val="111111"/>
                   </a:solidFill>
@@ -11420,7 +11549,7 @@
                 </a:rPr>
                 <a:t>The mean has been heavily skewed and distorted by a single extreme outlier.</a:t>
               </a:r>
-              <a:endParaRPr sz="1050" b="1">
+              <a:endParaRPr sz="1050" b="1" dirty="0">
                 <a:solidFill>
                   <a:srgbClr val="111111"/>
                 </a:solidFill>
@@ -11665,7 +11794,7 @@
   <p:cSld>
     <p:spTree>
       <p:nvGrpSpPr>
-        <p:cNvPr id="176" name="Shape 176"/>
+        <p:cNvPr id="1" name="Shape 176"/>
         <p:cNvGrpSpPr/>
         <p:nvPr/>
       </p:nvGrpSpPr>
@@ -11721,6 +11850,7 @@
               </a:spcAft>
               <a:buNone/>
             </a:pPr>
+            <a:endParaRPr/>
           </a:p>
         </p:txBody>
       </p:sp>
@@ -11760,6 +11890,7 @@
               </a:spcAft>
               <a:buNone/>
             </a:pPr>
+            <a:endParaRPr/>
           </a:p>
         </p:txBody>
       </p:sp>
@@ -11805,51 +11936,7 @@
               </a:spcAft>
               <a:buNone/>
             </a:pPr>
-          </a:p>
-        </p:txBody>
-      </p:sp>
-      <p:sp>
-        <p:nvSpPr>
-          <p:cNvPr id="180" name="Google Shape;180;p17"/>
-          <p:cNvSpPr/>
-          <p:nvPr/>
-        </p:nvSpPr>
-        <p:spPr>
-          <a:xfrm>
-            <a:off x="0" y="4762500"/>
-            <a:ext cx="9144000" cy="381000"/>
-          </a:xfrm>
-          <a:prstGeom prst="rect">
-            <a:avLst/>
-          </a:prstGeom>
-          <a:solidFill>
-            <a:srgbClr val="FFDE59"/>
-          </a:solidFill>
-          <a:ln w="38100" cap="flat" cmpd="sng">
-            <a:solidFill>
-              <a:srgbClr val="111111"/>
-            </a:solidFill>
-            <a:prstDash val="solid"/>
-            <a:round/>
-            <a:headEnd type="none" w="sm" len="sm"/>
-            <a:tailEnd type="none" w="sm" len="sm"/>
-          </a:ln>
-        </p:spPr>
-        <p:txBody>
-          <a:bodyPr spcFirstLastPara="1" wrap="square" lIns="0" tIns="0" rIns="0" bIns="0" anchor="ctr" anchorCtr="0">
-            <a:noAutofit/>
-          </a:bodyPr>
-          <a:lstStyle/>
-          <a:p>
-            <a:pPr marL="0" lvl="0" indent="0" algn="l" rtl="0">
-              <a:spcBef>
-                <a:spcPts val="0"/>
-              </a:spcBef>
-              <a:spcAft>
-                <a:spcPts val="0"/>
-              </a:spcAft>
-              <a:buNone/>
-            </a:pPr>
+            <a:endParaRPr/>
           </a:p>
         </p:txBody>
       </p:sp>
@@ -11861,7 +11948,7 @@
         </p:nvSpPr>
         <p:spPr>
           <a:xfrm>
-            <a:off x="381000" y="95250"/>
+            <a:off x="381000" y="315686"/>
             <a:ext cx="8382000" cy="762000"/>
           </a:xfrm>
           <a:prstGeom prst="rect">
@@ -11888,7 +11975,7 @@
               <a:buNone/>
             </a:pPr>
             <a:r>
-              <a:rPr lang="en-GB" sz="2850" b="1">
+              <a:rPr lang="en-GB" sz="2850" b="1" dirty="0">
                 <a:solidFill>
                   <a:srgbClr val="111111"/>
                 </a:solidFill>
@@ -11899,15 +11986,6 @@
               </a:rPr>
               <a:t>THE MEDIAN SAVES THE DAY!</a:t>
             </a:r>
-            <a:endParaRPr lang="en-GB" sz="2850" b="1">
-              <a:solidFill>
-                <a:srgbClr val="111111"/>
-              </a:solidFill>
-              <a:latin typeface="Space Grotesk"/>
-              <a:ea typeface="Space Grotesk"/>
-              <a:cs typeface="Space Grotesk"/>
-              <a:sym typeface="Space Grotesk"/>
-            </a:endParaRPr>
           </a:p>
         </p:txBody>
       </p:sp>
@@ -11918,7 +11996,7 @@
           <p:nvPr/>
         </p:nvPicPr>
         <p:blipFill rotWithShape="1">
-          <a:blip r:embed="rId1"/>
+          <a:blip r:embed="rId3"/>
           <a:srcRect/>
           <a:stretch>
             <a:fillRect/>
@@ -11990,6 +12068,7 @@
                 </a:spcAft>
                 <a:buNone/>
               </a:pPr>
+              <a:endParaRPr sz="1800"/>
             </a:p>
           </p:txBody>
         </p:sp>
@@ -12037,6 +12116,7 @@
                 </a:spcAft>
                 <a:buNone/>
               </a:pPr>
+              <a:endParaRPr sz="1800"/>
             </a:p>
           </p:txBody>
         </p:sp>
@@ -12075,7 +12155,7 @@
                 <a:buNone/>
               </a:pPr>
               <a:r>
-                <a:rPr lang="en-GB" sz="1350" b="1">
+                <a:rPr lang="en-GB" sz="1600" b="1">
                   <a:solidFill>
                     <a:srgbClr val="111111"/>
                   </a:solidFill>
@@ -12086,7 +12166,7 @@
                 </a:rPr>
                 <a:t>₹2,000</a:t>
               </a:r>
-              <a:endParaRPr sz="1350" b="1">
+              <a:endParaRPr sz="1600" b="1">
                 <a:solidFill>
                   <a:srgbClr val="111111"/>
                 </a:solidFill>
@@ -12151,6 +12231,7 @@
                 </a:spcAft>
                 <a:buNone/>
               </a:pPr>
+              <a:endParaRPr sz="1800"/>
             </a:p>
           </p:txBody>
         </p:sp>
@@ -12198,6 +12279,7 @@
                 </a:spcAft>
                 <a:buNone/>
               </a:pPr>
+              <a:endParaRPr sz="1800"/>
             </a:p>
           </p:txBody>
         </p:sp>
@@ -12236,7 +12318,7 @@
                 <a:buNone/>
               </a:pPr>
               <a:r>
-                <a:rPr lang="en-GB" sz="1350" b="1">
+                <a:rPr lang="en-GB" sz="1600" b="1">
                   <a:solidFill>
                     <a:srgbClr val="111111"/>
                   </a:solidFill>
@@ -12247,7 +12329,7 @@
                 </a:rPr>
                 <a:t>₹3,000</a:t>
               </a:r>
-              <a:endParaRPr sz="1350" b="1">
+              <a:endParaRPr sz="1600" b="1">
                 <a:solidFill>
                   <a:srgbClr val="111111"/>
                 </a:solidFill>
@@ -12312,6 +12394,7 @@
                 </a:spcAft>
                 <a:buNone/>
               </a:pPr>
+              <a:endParaRPr sz="1800"/>
             </a:p>
           </p:txBody>
         </p:sp>
@@ -12359,6 +12442,7 @@
                 </a:spcAft>
                 <a:buNone/>
               </a:pPr>
+              <a:endParaRPr sz="1800"/>
             </a:p>
           </p:txBody>
         </p:sp>
@@ -12397,7 +12481,7 @@
                 <a:buNone/>
               </a:pPr>
               <a:r>
-                <a:rPr lang="en-GB" sz="1350" b="1">
+                <a:rPr lang="en-GB" sz="1600" b="1">
                   <a:solidFill>
                     <a:srgbClr val="111111"/>
                   </a:solidFill>
@@ -12408,7 +12492,7 @@
                 </a:rPr>
                 <a:t>₹3,500</a:t>
               </a:r>
-              <a:endParaRPr sz="1350" b="1">
+              <a:endParaRPr sz="1600" b="1">
                 <a:solidFill>
                   <a:srgbClr val="111111"/>
                 </a:solidFill>
@@ -12473,6 +12557,7 @@
                 </a:spcAft>
                 <a:buNone/>
               </a:pPr>
+              <a:endParaRPr sz="1800"/>
             </a:p>
           </p:txBody>
         </p:sp>
@@ -12520,6 +12605,7 @@
                 </a:spcAft>
                 <a:buNone/>
               </a:pPr>
+              <a:endParaRPr sz="1800"/>
             </a:p>
           </p:txBody>
         </p:sp>
@@ -12558,7 +12644,7 @@
                 <a:buNone/>
               </a:pPr>
               <a:r>
-                <a:rPr lang="en-GB" sz="1350" b="1">
+                <a:rPr lang="en-GB" sz="1600" b="1">
                   <a:solidFill>
                     <a:srgbClr val="111111"/>
                   </a:solidFill>
@@ -12569,7 +12655,7 @@
                 </a:rPr>
                 <a:t>₹4,000</a:t>
               </a:r>
-              <a:endParaRPr sz="1350" b="1">
+              <a:endParaRPr sz="1600" b="1">
                 <a:solidFill>
                   <a:srgbClr val="111111"/>
                 </a:solidFill>
@@ -12634,6 +12720,7 @@
                 </a:spcAft>
                 <a:buNone/>
               </a:pPr>
+              <a:endParaRPr sz="1800"/>
             </a:p>
           </p:txBody>
         </p:sp>
@@ -12681,6 +12768,7 @@
                 </a:spcAft>
                 <a:buNone/>
               </a:pPr>
+              <a:endParaRPr sz="1800"/>
             </a:p>
           </p:txBody>
         </p:sp>
@@ -12719,7 +12807,7 @@
                 <a:buNone/>
               </a:pPr>
               <a:r>
-                <a:rPr lang="en-GB" sz="1350" b="1">
+                <a:rPr lang="en-GB" sz="1600" b="1">
                   <a:solidFill>
                     <a:srgbClr val="111111"/>
                   </a:solidFill>
@@ -12730,7 +12818,7 @@
                 </a:rPr>
                 <a:t>₹5,000</a:t>
               </a:r>
-              <a:endParaRPr sz="1350" b="1">
+              <a:endParaRPr sz="1600" b="1">
                 <a:solidFill>
                   <a:srgbClr val="111111"/>
                 </a:solidFill>
@@ -12795,6 +12883,7 @@
                 </a:spcAft>
                 <a:buNone/>
               </a:pPr>
+              <a:endParaRPr sz="1800"/>
             </a:p>
           </p:txBody>
         </p:sp>
@@ -12842,6 +12931,7 @@
                 </a:spcAft>
                 <a:buNone/>
               </a:pPr>
+              <a:endParaRPr sz="1800"/>
             </a:p>
           </p:txBody>
         </p:sp>
@@ -12880,7 +12970,7 @@
                 <a:buNone/>
               </a:pPr>
               <a:r>
-                <a:rPr lang="en-GB" sz="1125" b="1">
+                <a:rPr lang="en-GB" b="1">
                   <a:solidFill>
                     <a:srgbClr val="111111"/>
                   </a:solidFill>
@@ -12891,7 +12981,7 @@
                 </a:rPr>
                 <a:t>₹42,500</a:t>
               </a:r>
-              <a:endParaRPr sz="1125" b="1">
+              <a:endParaRPr b="1">
                 <a:solidFill>
                   <a:srgbClr val="111111"/>
                 </a:solidFill>
@@ -12956,6 +13046,7 @@
                 </a:spcAft>
                 <a:buNone/>
               </a:pPr>
+              <a:endParaRPr sz="1800"/>
             </a:p>
           </p:txBody>
         </p:sp>
@@ -13003,6 +13094,7 @@
                 </a:spcAft>
                 <a:buNone/>
               </a:pPr>
+              <a:endParaRPr sz="1800"/>
             </a:p>
           </p:txBody>
         </p:sp>
@@ -13041,7 +13133,7 @@
                 <a:buNone/>
               </a:pPr>
               <a:r>
-                <a:rPr lang="en-GB" sz="750" b="1">
+                <a:rPr lang="en-GB" sz="900" b="1">
                   <a:solidFill>
                     <a:srgbClr val="111111"/>
                   </a:solidFill>
@@ -13052,7 +13144,7 @@
                 </a:rPr>
                 <a:t>MIDDLE</a:t>
               </a:r>
-              <a:endParaRPr sz="750" b="1">
+              <a:endParaRPr sz="900" b="1">
                 <a:solidFill>
                   <a:srgbClr val="111111"/>
                 </a:solidFill>
@@ -13117,6 +13209,7 @@
                 </a:spcAft>
                 <a:buNone/>
               </a:pPr>
+              <a:endParaRPr sz="1800"/>
             </a:p>
           </p:txBody>
         </p:sp>
@@ -13164,6 +13257,7 @@
                 </a:spcAft>
                 <a:buNone/>
               </a:pPr>
+              <a:endParaRPr sz="1800"/>
             </a:p>
           </p:txBody>
         </p:sp>
@@ -13202,7 +13296,7 @@
                 <a:buNone/>
               </a:pPr>
               <a:r>
-                <a:rPr lang="en-GB" sz="750" b="1">
+                <a:rPr lang="en-GB" sz="900" b="1">
                   <a:solidFill>
                     <a:srgbClr val="111111"/>
                   </a:solidFill>
@@ -13213,7 +13307,7 @@
                 </a:rPr>
                 <a:t>MIDDLE</a:t>
               </a:r>
-              <a:endParaRPr sz="750" b="1">
+              <a:endParaRPr sz="900" b="1">
                 <a:solidFill>
                   <a:srgbClr val="111111"/>
                 </a:solidFill>
@@ -13278,6 +13372,7 @@
                 </a:spcAft>
                 <a:buNone/>
               </a:pPr>
+              <a:endParaRPr sz="1800"/>
             </a:p>
           </p:txBody>
         </p:sp>
@@ -13325,6 +13420,7 @@
                 </a:spcAft>
                 <a:buNone/>
               </a:pPr>
+              <a:endParaRPr sz="1800"/>
             </a:p>
           </p:txBody>
         </p:sp>
@@ -13363,7 +13459,7 @@
                 <a:buNone/>
               </a:pPr>
               <a:r>
-                <a:rPr lang="en-GB" sz="750" b="1">
+                <a:rPr lang="en-GB" sz="900" b="1">
                   <a:solidFill>
                     <a:srgbClr val="111111"/>
                   </a:solidFill>
@@ -13374,7 +13470,7 @@
                 </a:rPr>
                 <a:t>OUTLIER!</a:t>
               </a:r>
-              <a:endParaRPr sz="750" b="1">
+              <a:endParaRPr sz="900" b="1">
                 <a:solidFill>
                   <a:srgbClr val="111111"/>
                 </a:solidFill>
@@ -13457,6 +13553,7 @@
               </a:spcAft>
               <a:buNone/>
             </a:pPr>
+            <a:endParaRPr sz="1800"/>
           </a:p>
         </p:txBody>
       </p:sp>
@@ -13516,6 +13613,7 @@
                 </a:spcAft>
                 <a:buNone/>
               </a:pPr>
+              <a:endParaRPr sz="1800"/>
             </a:p>
           </p:txBody>
         </p:sp>
@@ -13554,7 +13652,7 @@
                 <a:buNone/>
               </a:pPr>
               <a:r>
-                <a:rPr lang="en-GB" sz="2700" b="1">
+                <a:rPr lang="en-GB" sz="3200" b="1" dirty="0">
                   <a:solidFill>
                     <a:srgbClr val="111111"/>
                   </a:solidFill>
@@ -13565,15 +13663,6 @@
                 </a:rPr>
                 <a:t>₹</a:t>
               </a:r>
-              <a:endParaRPr lang="en-GB" sz="2700" b="1">
-                <a:solidFill>
-                  <a:srgbClr val="111111"/>
-                </a:solidFill>
-                <a:latin typeface="Space Grotesk"/>
-                <a:ea typeface="Space Grotesk"/>
-                <a:cs typeface="Space Grotesk"/>
-                <a:sym typeface="Space Grotesk"/>
-              </a:endParaRPr>
             </a:p>
           </p:txBody>
         </p:sp>
@@ -13658,6 +13747,7 @@
                 </a:spcAft>
                 <a:buNone/>
               </a:pPr>
+              <a:endParaRPr sz="1800"/>
             </a:p>
           </p:txBody>
         </p:sp>
@@ -13733,6 +13823,7 @@
                 </a:spcAft>
                 <a:buNone/>
               </a:pPr>
+              <a:endParaRPr sz="1800"/>
             </a:p>
           </p:txBody>
         </p:sp>
@@ -13789,6 +13880,7 @@
                 </a:spcAft>
                 <a:buNone/>
               </a:pPr>
+              <a:endParaRPr sz="1800"/>
             </a:p>
           </p:txBody>
         </p:sp>
@@ -13836,6 +13928,7 @@
                 </a:spcAft>
                 <a:buNone/>
               </a:pPr>
+              <a:endParaRPr sz="1800"/>
             </a:p>
           </p:txBody>
         </p:sp>
@@ -13874,7 +13967,7 @@
                 <a:buNone/>
               </a:pPr>
               <a:r>
-                <a:rPr lang="en-GB" sz="1350" b="1">
+                <a:rPr lang="en-GB" sz="1600" b="1">
                   <a:solidFill>
                     <a:srgbClr val="111111"/>
                   </a:solidFill>
@@ -13885,7 +13978,7 @@
                 </a:rPr>
                 <a:t>MEDIAN = ₹3,750</a:t>
               </a:r>
-              <a:endParaRPr sz="1350" b="1">
+              <a:endParaRPr sz="1600" b="1">
                 <a:solidFill>
                   <a:srgbClr val="111111"/>
                 </a:solidFill>
@@ -13906,7 +13999,7 @@
                 <a:buNone/>
               </a:pPr>
               <a:r>
-                <a:rPr lang="en-GB" sz="975" b="0">
+                <a:rPr lang="en-GB" sz="1050" b="0">
                   <a:solidFill>
                     <a:srgbClr val="111111"/>
                   </a:solidFill>
@@ -13917,7 +14010,7 @@
                 </a:rPr>
                 <a:t>(₹3,500 + ₹4,000) ÷ 2</a:t>
               </a:r>
-              <a:endParaRPr sz="975" b="0">
+              <a:endParaRPr sz="1050" b="0">
                 <a:solidFill>
                   <a:srgbClr val="111111"/>
                 </a:solidFill>
@@ -13938,8 +14031,8 @@
         </p:nvGrpSpPr>
         <p:grpSpPr>
           <a:xfrm>
-            <a:off x="5810250" y="2409825"/>
-            <a:ext cx="2800500" cy="676200"/>
+            <a:off x="782053" y="3420837"/>
+            <a:ext cx="7628021" cy="1076138"/>
             <a:chOff x="5810250" y="2409825"/>
             <a:chExt cx="2800500" cy="676200"/>
           </a:xfrm>
@@ -13982,6 +14075,7 @@
                 </a:spcAft>
                 <a:buNone/>
               </a:pPr>
+              <a:endParaRPr sz="3600"/>
             </a:p>
           </p:txBody>
         </p:sp>
@@ -14029,6 +14123,7 @@
                 </a:spcAft>
                 <a:buNone/>
               </a:pPr>
+              <a:endParaRPr sz="3600"/>
             </a:p>
           </p:txBody>
         </p:sp>
@@ -14067,7 +14162,7 @@
                 <a:buNone/>
               </a:pPr>
               <a:r>
-                <a:rPr lang="en-GB" sz="900" b="1">
+                <a:rPr lang="en-GB" sz="1800" b="1" dirty="0">
                   <a:solidFill>
                     <a:srgbClr val="111111"/>
                   </a:solidFill>
@@ -14076,9 +14171,63 @@
                   <a:cs typeface="Outfit"/>
                   <a:sym typeface="Outfit"/>
                 </a:rPr>
-                <a:t>The median of ₹3,750 is only a tiny change from the original ₹3,500, completely ignoring the billionaire outlier.</a:t>
+                <a:t>The median of </a:t>
               </a:r>
-              <a:endParaRPr sz="900" b="1">
+              <a:r>
+                <a:rPr lang="en-GB" sz="1800" b="1" dirty="0">
+                  <a:solidFill>
+                    <a:srgbClr val="111111"/>
+                  </a:solidFill>
+                  <a:highlight>
+                    <a:srgbClr val="FFFF00"/>
+                  </a:highlight>
+                  <a:latin typeface="Outfit"/>
+                  <a:ea typeface="Outfit"/>
+                  <a:cs typeface="Outfit"/>
+                  <a:sym typeface="Outfit"/>
+                </a:rPr>
+                <a:t>₹3,750 </a:t>
+              </a:r>
+              <a:r>
+                <a:rPr lang="en-GB" sz="1800" b="1" dirty="0">
+                  <a:solidFill>
+                    <a:srgbClr val="111111"/>
+                  </a:solidFill>
+                  <a:latin typeface="Outfit"/>
+                  <a:ea typeface="Outfit"/>
+                  <a:cs typeface="Outfit"/>
+                  <a:sym typeface="Outfit"/>
+                </a:rPr>
+                <a:t>is only a tiny change from the original </a:t>
+              </a:r>
+              <a:r>
+                <a:rPr lang="en-GB" sz="1800" b="1" dirty="0">
+                  <a:solidFill>
+                    <a:srgbClr val="111111"/>
+                  </a:solidFill>
+                  <a:highlight>
+                    <a:srgbClr val="FFFF00"/>
+                  </a:highlight>
+                  <a:latin typeface="Outfit"/>
+                  <a:ea typeface="Outfit"/>
+                  <a:cs typeface="Outfit"/>
+                  <a:sym typeface="Outfit"/>
+                </a:rPr>
+                <a:t>₹3,500</a:t>
+              </a:r>
+              <a:r>
+                <a:rPr lang="en-GB" sz="1800" b="1" dirty="0">
+                  <a:solidFill>
+                    <a:srgbClr val="111111"/>
+                  </a:solidFill>
+                  <a:latin typeface="Outfit"/>
+                  <a:ea typeface="Outfit"/>
+                  <a:cs typeface="Outfit"/>
+                  <a:sym typeface="Outfit"/>
+                </a:rPr>
+                <a:t>, completely ignoring the billionaire outlier.</a:t>
+              </a:r>
+              <a:endParaRPr sz="1800" b="1" dirty="0">
                 <a:solidFill>
                   <a:srgbClr val="111111"/>
                 </a:solidFill>
@@ -14091,15 +14240,779 @@
           </p:txBody>
         </p:sp>
       </p:grpSp>
+    </p:spTree>
+  </p:cSld>
+  <p:clrMapOvr>
+    <a:masterClrMapping/>
+  </p:clrMapOvr>
+  <p:timing>
+    <p:tnLst>
+      <p:par>
+        <p:cTn id="1" dur="indefinite" restart="never" nodeType="tmRoot">
+          <p:childTnLst>
+            <p:seq concurrent="1" nextAc="seek">
+              <p:cTn id="2" dur="indefinite" nodeType="mainSeq">
+                <p:childTnLst>
+                  <p:par>
+                    <p:cTn id="3" fill="hold">
+                      <p:stCondLst>
+                        <p:cond delay="indefinite"/>
+                      </p:stCondLst>
+                      <p:childTnLst>
+                        <p:par>
+                          <p:cTn id="4" fill="hold">
+                            <p:stCondLst>
+                              <p:cond delay="0"/>
+                            </p:stCondLst>
+                            <p:childTnLst>
+                              <p:par>
+                                <p:cTn id="5" presetID="1" presetClass="entr" presetSubtype="0" fill="hold" grpId="0" nodeType="clickEffect">
+                                  <p:stCondLst>
+                                    <p:cond delay="0"/>
+                                  </p:stCondLst>
+                                  <p:childTnLst>
+                                    <p:set>
+                                      <p:cBhvr>
+                                        <p:cTn id="6" dur="1" fill="hold">
+                                          <p:stCondLst>
+                                            <p:cond delay="0"/>
+                                          </p:stCondLst>
+                                        </p:cTn>
+                                        <p:tgtEl>
+                                          <p:spTgt spid="181"/>
+                                        </p:tgtEl>
+                                        <p:attrNameLst>
+                                          <p:attrName>style.visibility</p:attrName>
+                                        </p:attrNameLst>
+                                      </p:cBhvr>
+                                      <p:to>
+                                        <p:strVal val="visible"/>
+                                      </p:to>
+                                    </p:set>
+                                  </p:childTnLst>
+                                </p:cTn>
+                              </p:par>
+                            </p:childTnLst>
+                          </p:cTn>
+                        </p:par>
+                      </p:childTnLst>
+                    </p:cTn>
+                  </p:par>
+                  <p:par>
+                    <p:cTn id="7" fill="hold">
+                      <p:stCondLst>
+                        <p:cond delay="indefinite"/>
+                      </p:stCondLst>
+                      <p:childTnLst>
+                        <p:par>
+                          <p:cTn id="8" fill="hold">
+                            <p:stCondLst>
+                              <p:cond delay="0"/>
+                            </p:stCondLst>
+                            <p:childTnLst>
+                              <p:par>
+                                <p:cTn id="9" presetID="1" presetClass="entr" presetSubtype="0" fill="hold" nodeType="clickEffect">
+                                  <p:stCondLst>
+                                    <p:cond delay="0"/>
+                                  </p:stCondLst>
+                                  <p:childTnLst>
+                                    <p:set>
+                                      <p:cBhvr>
+                                        <p:cTn id="10" dur="1" fill="hold">
+                                          <p:stCondLst>
+                                            <p:cond delay="0"/>
+                                          </p:stCondLst>
+                                        </p:cTn>
+                                        <p:tgtEl>
+                                          <p:spTgt spid="182"/>
+                                        </p:tgtEl>
+                                        <p:attrNameLst>
+                                          <p:attrName>style.visibility</p:attrName>
+                                        </p:attrNameLst>
+                                      </p:cBhvr>
+                                      <p:to>
+                                        <p:strVal val="visible"/>
+                                      </p:to>
+                                    </p:set>
+                                  </p:childTnLst>
+                                </p:cTn>
+                              </p:par>
+                              <p:par>
+                                <p:cTn id="11" presetID="1" presetClass="entr" presetSubtype="0" fill="hold" nodeType="withEffect">
+                                  <p:stCondLst>
+                                    <p:cond delay="0"/>
+                                  </p:stCondLst>
+                                  <p:childTnLst>
+                                    <p:set>
+                                      <p:cBhvr>
+                                        <p:cTn id="12" dur="1" fill="hold">
+                                          <p:stCondLst>
+                                            <p:cond delay="0"/>
+                                          </p:stCondLst>
+                                        </p:cTn>
+                                        <p:tgtEl>
+                                          <p:spTgt spid="183"/>
+                                        </p:tgtEl>
+                                        <p:attrNameLst>
+                                          <p:attrName>style.visibility</p:attrName>
+                                        </p:attrNameLst>
+                                      </p:cBhvr>
+                                      <p:to>
+                                        <p:strVal val="visible"/>
+                                      </p:to>
+                                    </p:set>
+                                  </p:childTnLst>
+                                </p:cTn>
+                              </p:par>
+                              <p:par>
+                                <p:cTn id="13" presetID="1" presetClass="entr" presetSubtype="0" fill="hold" nodeType="withEffect">
+                                  <p:stCondLst>
+                                    <p:cond delay="0"/>
+                                  </p:stCondLst>
+                                  <p:childTnLst>
+                                    <p:set>
+                                      <p:cBhvr>
+                                        <p:cTn id="14" dur="1" fill="hold">
+                                          <p:stCondLst>
+                                            <p:cond delay="0"/>
+                                          </p:stCondLst>
+                                        </p:cTn>
+                                        <p:tgtEl>
+                                          <p:spTgt spid="187"/>
+                                        </p:tgtEl>
+                                        <p:attrNameLst>
+                                          <p:attrName>style.visibility</p:attrName>
+                                        </p:attrNameLst>
+                                      </p:cBhvr>
+                                      <p:to>
+                                        <p:strVal val="visible"/>
+                                      </p:to>
+                                    </p:set>
+                                  </p:childTnLst>
+                                </p:cTn>
+                              </p:par>
+                              <p:par>
+                                <p:cTn id="15" presetID="1" presetClass="entr" presetSubtype="0" fill="hold" nodeType="withEffect">
+                                  <p:stCondLst>
+                                    <p:cond delay="0"/>
+                                  </p:stCondLst>
+                                  <p:childTnLst>
+                                    <p:set>
+                                      <p:cBhvr>
+                                        <p:cTn id="16" dur="1" fill="hold">
+                                          <p:stCondLst>
+                                            <p:cond delay="0"/>
+                                          </p:stCondLst>
+                                        </p:cTn>
+                                        <p:tgtEl>
+                                          <p:spTgt spid="191"/>
+                                        </p:tgtEl>
+                                        <p:attrNameLst>
+                                          <p:attrName>style.visibility</p:attrName>
+                                        </p:attrNameLst>
+                                      </p:cBhvr>
+                                      <p:to>
+                                        <p:strVal val="visible"/>
+                                      </p:to>
+                                    </p:set>
+                                  </p:childTnLst>
+                                </p:cTn>
+                              </p:par>
+                              <p:par>
+                                <p:cTn id="17" presetID="1" presetClass="entr" presetSubtype="0" fill="hold" nodeType="withEffect">
+                                  <p:stCondLst>
+                                    <p:cond delay="0"/>
+                                  </p:stCondLst>
+                                  <p:childTnLst>
+                                    <p:set>
+                                      <p:cBhvr>
+                                        <p:cTn id="18" dur="1" fill="hold">
+                                          <p:stCondLst>
+                                            <p:cond delay="0"/>
+                                          </p:stCondLst>
+                                        </p:cTn>
+                                        <p:tgtEl>
+                                          <p:spTgt spid="195"/>
+                                        </p:tgtEl>
+                                        <p:attrNameLst>
+                                          <p:attrName>style.visibility</p:attrName>
+                                        </p:attrNameLst>
+                                      </p:cBhvr>
+                                      <p:to>
+                                        <p:strVal val="visible"/>
+                                      </p:to>
+                                    </p:set>
+                                  </p:childTnLst>
+                                </p:cTn>
+                              </p:par>
+                              <p:par>
+                                <p:cTn id="19" presetID="1" presetClass="entr" presetSubtype="0" fill="hold" nodeType="withEffect">
+                                  <p:stCondLst>
+                                    <p:cond delay="0"/>
+                                  </p:stCondLst>
+                                  <p:childTnLst>
+                                    <p:set>
+                                      <p:cBhvr>
+                                        <p:cTn id="20" dur="1" fill="hold">
+                                          <p:stCondLst>
+                                            <p:cond delay="0"/>
+                                          </p:stCondLst>
+                                        </p:cTn>
+                                        <p:tgtEl>
+                                          <p:spTgt spid="199"/>
+                                        </p:tgtEl>
+                                        <p:attrNameLst>
+                                          <p:attrName>style.visibility</p:attrName>
+                                        </p:attrNameLst>
+                                      </p:cBhvr>
+                                      <p:to>
+                                        <p:strVal val="visible"/>
+                                      </p:to>
+                                    </p:set>
+                                  </p:childTnLst>
+                                </p:cTn>
+                              </p:par>
+                              <p:par>
+                                <p:cTn id="21" presetID="1" presetClass="entr" presetSubtype="0" fill="hold" nodeType="withEffect">
+                                  <p:stCondLst>
+                                    <p:cond delay="0"/>
+                                  </p:stCondLst>
+                                  <p:childTnLst>
+                                    <p:set>
+                                      <p:cBhvr>
+                                        <p:cTn id="22" dur="1" fill="hold">
+                                          <p:stCondLst>
+                                            <p:cond delay="0"/>
+                                          </p:stCondLst>
+                                        </p:cTn>
+                                        <p:tgtEl>
+                                          <p:spTgt spid="203"/>
+                                        </p:tgtEl>
+                                        <p:attrNameLst>
+                                          <p:attrName>style.visibility</p:attrName>
+                                        </p:attrNameLst>
+                                      </p:cBhvr>
+                                      <p:to>
+                                        <p:strVal val="visible"/>
+                                      </p:to>
+                                    </p:set>
+                                  </p:childTnLst>
+                                </p:cTn>
+                              </p:par>
+                              <p:par>
+                                <p:cTn id="23" presetID="1" presetClass="entr" presetSubtype="0" fill="hold" nodeType="withEffect">
+                                  <p:stCondLst>
+                                    <p:cond delay="0"/>
+                                  </p:stCondLst>
+                                  <p:childTnLst>
+                                    <p:set>
+                                      <p:cBhvr>
+                                        <p:cTn id="24" dur="1" fill="hold">
+                                          <p:stCondLst>
+                                            <p:cond delay="0"/>
+                                          </p:stCondLst>
+                                        </p:cTn>
+                                        <p:tgtEl>
+                                          <p:spTgt spid="207"/>
+                                        </p:tgtEl>
+                                        <p:attrNameLst>
+                                          <p:attrName>style.visibility</p:attrName>
+                                        </p:attrNameLst>
+                                      </p:cBhvr>
+                                      <p:to>
+                                        <p:strVal val="visible"/>
+                                      </p:to>
+                                    </p:set>
+                                  </p:childTnLst>
+                                </p:cTn>
+                              </p:par>
+                              <p:par>
+                                <p:cTn id="25" presetID="1" presetClass="entr" presetSubtype="0" fill="hold" nodeType="withEffect">
+                                  <p:stCondLst>
+                                    <p:cond delay="0"/>
+                                  </p:stCondLst>
+                                  <p:childTnLst>
+                                    <p:set>
+                                      <p:cBhvr>
+                                        <p:cTn id="26" dur="1" fill="hold">
+                                          <p:stCondLst>
+                                            <p:cond delay="0"/>
+                                          </p:stCondLst>
+                                        </p:cTn>
+                                        <p:tgtEl>
+                                          <p:spTgt spid="211"/>
+                                        </p:tgtEl>
+                                        <p:attrNameLst>
+                                          <p:attrName>style.visibility</p:attrName>
+                                        </p:attrNameLst>
+                                      </p:cBhvr>
+                                      <p:to>
+                                        <p:strVal val="visible"/>
+                                      </p:to>
+                                    </p:set>
+                                  </p:childTnLst>
+                                </p:cTn>
+                              </p:par>
+                              <p:par>
+                                <p:cTn id="27" presetID="1" presetClass="entr" presetSubtype="0" fill="hold" nodeType="withEffect">
+                                  <p:stCondLst>
+                                    <p:cond delay="0"/>
+                                  </p:stCondLst>
+                                  <p:childTnLst>
+                                    <p:set>
+                                      <p:cBhvr>
+                                        <p:cTn id="28" dur="1" fill="hold">
+                                          <p:stCondLst>
+                                            <p:cond delay="0"/>
+                                          </p:stCondLst>
+                                        </p:cTn>
+                                        <p:tgtEl>
+                                          <p:spTgt spid="215"/>
+                                        </p:tgtEl>
+                                        <p:attrNameLst>
+                                          <p:attrName>style.visibility</p:attrName>
+                                        </p:attrNameLst>
+                                      </p:cBhvr>
+                                      <p:to>
+                                        <p:strVal val="visible"/>
+                                      </p:to>
+                                    </p:set>
+                                  </p:childTnLst>
+                                </p:cTn>
+                              </p:par>
+                              <p:par>
+                                <p:cTn id="29" presetID="1" presetClass="entr" presetSubtype="0" fill="hold" grpId="0" nodeType="withEffect">
+                                  <p:stCondLst>
+                                    <p:cond delay="0"/>
+                                  </p:stCondLst>
+                                  <p:childTnLst>
+                                    <p:set>
+                                      <p:cBhvr>
+                                        <p:cTn id="30" dur="1" fill="hold">
+                                          <p:stCondLst>
+                                            <p:cond delay="0"/>
+                                          </p:stCondLst>
+                                        </p:cTn>
+                                        <p:tgtEl>
+                                          <p:spTgt spid="219"/>
+                                        </p:tgtEl>
+                                        <p:attrNameLst>
+                                          <p:attrName>style.visibility</p:attrName>
+                                        </p:attrNameLst>
+                                      </p:cBhvr>
+                                      <p:to>
+                                        <p:strVal val="visible"/>
+                                      </p:to>
+                                    </p:set>
+                                  </p:childTnLst>
+                                </p:cTn>
+                              </p:par>
+                              <p:par>
+                                <p:cTn id="31" presetID="1" presetClass="entr" presetSubtype="0" fill="hold" nodeType="withEffect">
+                                  <p:stCondLst>
+                                    <p:cond delay="0"/>
+                                  </p:stCondLst>
+                                  <p:childTnLst>
+                                    <p:set>
+                                      <p:cBhvr>
+                                        <p:cTn id="32" dur="1" fill="hold">
+                                          <p:stCondLst>
+                                            <p:cond delay="0"/>
+                                          </p:stCondLst>
+                                        </p:cTn>
+                                        <p:tgtEl>
+                                          <p:spTgt spid="220"/>
+                                        </p:tgtEl>
+                                        <p:attrNameLst>
+                                          <p:attrName>style.visibility</p:attrName>
+                                        </p:attrNameLst>
+                                      </p:cBhvr>
+                                      <p:to>
+                                        <p:strVal val="visible"/>
+                                      </p:to>
+                                    </p:set>
+                                  </p:childTnLst>
+                                </p:cTn>
+                              </p:par>
+                              <p:par>
+                                <p:cTn id="33" presetID="1" presetClass="entr" presetSubtype="0" fill="hold" nodeType="withEffect">
+                                  <p:stCondLst>
+                                    <p:cond delay="0"/>
+                                  </p:stCondLst>
+                                  <p:childTnLst>
+                                    <p:set>
+                                      <p:cBhvr>
+                                        <p:cTn id="34" dur="1" fill="hold">
+                                          <p:stCondLst>
+                                            <p:cond delay="0"/>
+                                          </p:stCondLst>
+                                        </p:cTn>
+                                        <p:tgtEl>
+                                          <p:spTgt spid="223"/>
+                                        </p:tgtEl>
+                                        <p:attrNameLst>
+                                          <p:attrName>style.visibility</p:attrName>
+                                        </p:attrNameLst>
+                                      </p:cBhvr>
+                                      <p:to>
+                                        <p:strVal val="visible"/>
+                                      </p:to>
+                                    </p:set>
+                                  </p:childTnLst>
+                                </p:cTn>
+                              </p:par>
+                              <p:par>
+                                <p:cTn id="35" presetID="1" presetClass="entr" presetSubtype="0" fill="hold" nodeType="withEffect">
+                                  <p:stCondLst>
+                                    <p:cond delay="0"/>
+                                  </p:stCondLst>
+                                  <p:childTnLst>
+                                    <p:set>
+                                      <p:cBhvr>
+                                        <p:cTn id="36" dur="1" fill="hold">
+                                          <p:stCondLst>
+                                            <p:cond delay="0"/>
+                                          </p:stCondLst>
+                                        </p:cTn>
+                                        <p:tgtEl>
+                                          <p:spTgt spid="226"/>
+                                        </p:tgtEl>
+                                        <p:attrNameLst>
+                                          <p:attrName>style.visibility</p:attrName>
+                                        </p:attrNameLst>
+                                      </p:cBhvr>
+                                      <p:to>
+                                        <p:strVal val="visible"/>
+                                      </p:to>
+                                    </p:set>
+                                  </p:childTnLst>
+                                </p:cTn>
+                              </p:par>
+                            </p:childTnLst>
+                          </p:cTn>
+                        </p:par>
+                      </p:childTnLst>
+                    </p:cTn>
+                  </p:par>
+                  <p:par>
+                    <p:cTn id="37" fill="hold">
+                      <p:stCondLst>
+                        <p:cond delay="indefinite"/>
+                      </p:stCondLst>
+                      <p:childTnLst>
+                        <p:par>
+                          <p:cTn id="38" fill="hold">
+                            <p:stCondLst>
+                              <p:cond delay="0"/>
+                            </p:stCondLst>
+                            <p:childTnLst>
+                              <p:par>
+                                <p:cTn id="39" presetID="1" presetClass="entr" presetSubtype="0" fill="hold" nodeType="clickEffect">
+                                  <p:stCondLst>
+                                    <p:cond delay="0"/>
+                                  </p:stCondLst>
+                                  <p:childTnLst>
+                                    <p:set>
+                                      <p:cBhvr>
+                                        <p:cTn id="40" dur="1" fill="hold">
+                                          <p:stCondLst>
+                                            <p:cond delay="0"/>
+                                          </p:stCondLst>
+                                        </p:cTn>
+                                        <p:tgtEl>
+                                          <p:spTgt spid="230"/>
+                                        </p:tgtEl>
+                                        <p:attrNameLst>
+                                          <p:attrName>style.visibility</p:attrName>
+                                        </p:attrNameLst>
+                                      </p:cBhvr>
+                                      <p:to>
+                                        <p:strVal val="visible"/>
+                                      </p:to>
+                                    </p:set>
+                                  </p:childTnLst>
+                                </p:cTn>
+                              </p:par>
+                            </p:childTnLst>
+                          </p:cTn>
+                        </p:par>
+                      </p:childTnLst>
+                    </p:cTn>
+                  </p:par>
+                </p:childTnLst>
+              </p:cTn>
+              <p:prevCondLst>
+                <p:cond evt="onPrev" delay="0">
+                  <p:tgtEl>
+                    <p:sldTgt/>
+                  </p:tgtEl>
+                </p:cond>
+              </p:prevCondLst>
+              <p:nextCondLst>
+                <p:cond evt="onNext" delay="0">
+                  <p:tgtEl>
+                    <p:sldTgt/>
+                  </p:tgtEl>
+                </p:cond>
+              </p:nextCondLst>
+            </p:seq>
+          </p:childTnLst>
+        </p:cTn>
+      </p:par>
+    </p:tnLst>
+    <p:bldLst>
+      <p:bldP spid="181" grpId="0"/>
+      <p:bldP spid="219" grpId="0" animBg="1"/>
+    </p:bldLst>
+  </p:timing>
+</p:sld>
+</file>
+
+<file path=ppt/slides/slide5.xml><?xml version="1.0" encoding="utf-8"?>
+<p:sld xmlns:a="http://schemas.openxmlformats.org/drawingml/2006/main" xmlns:r="http://schemas.openxmlformats.org/officeDocument/2006/relationships" xmlns:p="http://schemas.openxmlformats.org/presentationml/2006/main">
+  <p:cSld>
+    <p:spTree>
+      <p:nvGrpSpPr>
+        <p:cNvPr id="1" name="Shape 176">
+          <a:extLst>
+            <a:ext uri="{FF2B5EF4-FFF2-40B4-BE49-F238E27FC236}">
+              <a16:creationId xmlns:a16="http://schemas.microsoft.com/office/drawing/2014/main" id="{C0D94CA1-FCFA-9080-0722-4FAB1FCD292F}"/>
+            </a:ext>
+          </a:extLst>
+        </p:cNvPr>
+        <p:cNvGrpSpPr/>
+        <p:nvPr/>
+      </p:nvGrpSpPr>
+      <p:grpSpPr>
+        <a:xfrm>
+          <a:off x="0" y="0"/>
+          <a:ext cx="0" cy="0"/>
+          <a:chOff x="0" y="0"/>
+          <a:chExt cx="0" cy="0"/>
+        </a:xfrm>
+      </p:grpSpPr>
+      <p:sp>
+        <p:nvSpPr>
+          <p:cNvPr id="177" name="Google Shape;177;p17">
+            <a:extLst>
+              <a:ext uri="{FF2B5EF4-FFF2-40B4-BE49-F238E27FC236}">
+                <a16:creationId xmlns:a16="http://schemas.microsoft.com/office/drawing/2014/main" id="{7AC07B65-4DA1-A24C-5FCC-C230B0B0AE46}"/>
+              </a:ext>
+            </a:extLst>
+          </p:cNvPr>
+          <p:cNvSpPr/>
+          <p:nvPr/>
+        </p:nvSpPr>
+        <p:spPr>
+          <a:xfrm>
+            <a:off x="0" y="0"/>
+            <a:ext cx="9144000" cy="5143500"/>
+          </a:xfrm>
+          <a:prstGeom prst="rect">
+            <a:avLst/>
+          </a:prstGeom>
+          <a:solidFill>
+            <a:srgbClr val="000000">
+              <a:alpha val="0"/>
+            </a:srgbClr>
+          </a:solidFill>
+          <a:ln w="76200" cap="flat" cmpd="sng">
+            <a:solidFill>
+              <a:srgbClr val="111111"/>
+            </a:solidFill>
+            <a:prstDash val="solid"/>
+            <a:round/>
+            <a:headEnd type="none" w="sm" len="sm"/>
+            <a:tailEnd type="none" w="sm" len="sm"/>
+          </a:ln>
+        </p:spPr>
+        <p:txBody>
+          <a:bodyPr spcFirstLastPara="1" wrap="square" lIns="0" tIns="0" rIns="0" bIns="0" anchor="ctr" anchorCtr="0">
+            <a:noAutofit/>
+          </a:bodyPr>
+          <a:lstStyle/>
+          <a:p>
+            <a:pPr marL="0" lvl="0" indent="0" algn="l" rtl="0">
+              <a:spcBef>
+                <a:spcPts val="0"/>
+              </a:spcBef>
+              <a:spcAft>
+                <a:spcPts val="0"/>
+              </a:spcAft>
+              <a:buNone/>
+            </a:pPr>
+            <a:endParaRPr/>
+          </a:p>
+        </p:txBody>
+      </p:sp>
+      <p:sp>
+        <p:nvSpPr>
+          <p:cNvPr id="178" name="Google Shape;178;p17">
+            <a:extLst>
+              <a:ext uri="{FF2B5EF4-FFF2-40B4-BE49-F238E27FC236}">
+                <a16:creationId xmlns:a16="http://schemas.microsoft.com/office/drawing/2014/main" id="{E8FA5FC6-D373-4D40-4686-EECD654CD773}"/>
+              </a:ext>
+            </a:extLst>
+          </p:cNvPr>
+          <p:cNvSpPr/>
+          <p:nvPr/>
+        </p:nvSpPr>
+        <p:spPr>
+          <a:xfrm>
+            <a:off x="0" y="0"/>
+            <a:ext cx="9144000" cy="5143500"/>
+          </a:xfrm>
+          <a:prstGeom prst="rect">
+            <a:avLst/>
+          </a:prstGeom>
+          <a:solidFill>
+            <a:srgbClr val="FFFFFF"/>
+          </a:solidFill>
+          <a:ln>
+            <a:noFill/>
+          </a:ln>
+        </p:spPr>
+        <p:txBody>
+          <a:bodyPr spcFirstLastPara="1" wrap="square" lIns="0" tIns="0" rIns="0" bIns="0" anchor="ctr" anchorCtr="0">
+            <a:noAutofit/>
+          </a:bodyPr>
+          <a:lstStyle/>
+          <a:p>
+            <a:pPr marL="0" lvl="0" indent="0" algn="l" rtl="0">
+              <a:spcBef>
+                <a:spcPts val="0"/>
+              </a:spcBef>
+              <a:spcAft>
+                <a:spcPts val="0"/>
+              </a:spcAft>
+              <a:buNone/>
+            </a:pPr>
+            <a:endParaRPr/>
+          </a:p>
+        </p:txBody>
+      </p:sp>
+      <p:sp>
+        <p:nvSpPr>
+          <p:cNvPr id="179" name="Google Shape;179;p17">
+            <a:extLst>
+              <a:ext uri="{FF2B5EF4-FFF2-40B4-BE49-F238E27FC236}">
+                <a16:creationId xmlns:a16="http://schemas.microsoft.com/office/drawing/2014/main" id="{317A8EE6-0DE0-6277-D052-1250ED52F895}"/>
+              </a:ext>
+            </a:extLst>
+          </p:cNvPr>
+          <p:cNvSpPr/>
+          <p:nvPr/>
+        </p:nvSpPr>
+        <p:spPr>
+          <a:xfrm>
+            <a:off x="0" y="0"/>
+            <a:ext cx="9144000" cy="952500"/>
+          </a:xfrm>
+          <a:prstGeom prst="rect">
+            <a:avLst/>
+          </a:prstGeom>
+          <a:solidFill>
+            <a:srgbClr val="38B6FF"/>
+          </a:solidFill>
+          <a:ln w="38100" cap="flat" cmpd="sng">
+            <a:solidFill>
+              <a:srgbClr val="111111"/>
+            </a:solidFill>
+            <a:prstDash val="solid"/>
+            <a:round/>
+            <a:headEnd type="none" w="sm" len="sm"/>
+            <a:tailEnd type="none" w="sm" len="sm"/>
+          </a:ln>
+        </p:spPr>
+        <p:txBody>
+          <a:bodyPr spcFirstLastPara="1" wrap="square" lIns="0" tIns="0" rIns="0" bIns="0" anchor="ctr" anchorCtr="0">
+            <a:noAutofit/>
+          </a:bodyPr>
+          <a:lstStyle/>
+          <a:p>
+            <a:pPr marL="0" lvl="0" indent="0" algn="l" rtl="0">
+              <a:spcBef>
+                <a:spcPts val="0"/>
+              </a:spcBef>
+              <a:spcAft>
+                <a:spcPts val="0"/>
+              </a:spcAft>
+              <a:buNone/>
+            </a:pPr>
+            <a:endParaRPr/>
+          </a:p>
+        </p:txBody>
+      </p:sp>
+      <p:sp>
+        <p:nvSpPr>
+          <p:cNvPr id="181" name="Google Shape;181;p17">
+            <a:extLst>
+              <a:ext uri="{FF2B5EF4-FFF2-40B4-BE49-F238E27FC236}">
+                <a16:creationId xmlns:a16="http://schemas.microsoft.com/office/drawing/2014/main" id="{FCA80330-A43C-3F1E-0692-4F1A4B75639F}"/>
+              </a:ext>
+            </a:extLst>
+          </p:cNvPr>
+          <p:cNvSpPr txBox="1"/>
+          <p:nvPr/>
+        </p:nvSpPr>
+        <p:spPr>
+          <a:xfrm>
+            <a:off x="381000" y="227602"/>
+            <a:ext cx="8382000" cy="762000"/>
+          </a:xfrm>
+          <a:prstGeom prst="rect">
+            <a:avLst/>
+          </a:prstGeom>
+          <a:noFill/>
+          <a:ln>
+            <a:noFill/>
+          </a:ln>
+        </p:spPr>
+        <p:txBody>
+          <a:bodyPr spcFirstLastPara="1" wrap="square" lIns="0" tIns="0" rIns="0" bIns="0" anchor="t" anchorCtr="0">
+            <a:noAutofit/>
+          </a:bodyPr>
+          <a:lstStyle/>
+          <a:p>
+            <a:pPr marL="0" lvl="0" indent="0" algn="ctr" rtl="0">
+              <a:spcBef>
+                <a:spcPts val="0"/>
+              </a:spcBef>
+              <a:spcAft>
+                <a:spcPts val="0"/>
+              </a:spcAft>
+              <a:buNone/>
+            </a:pPr>
+            <a:r>
+              <a:rPr lang="en-GB" sz="2850" b="1" dirty="0">
+                <a:solidFill>
+                  <a:srgbClr val="111111"/>
+                </a:solidFill>
+                <a:latin typeface="Space Grotesk"/>
+                <a:ea typeface="Space Grotesk"/>
+                <a:cs typeface="Space Grotesk"/>
+                <a:sym typeface="Space Grotesk"/>
+              </a:rPr>
+              <a:t>RULE OF THUMB</a:t>
+            </a:r>
+          </a:p>
+        </p:txBody>
+      </p:sp>
       <p:grpSp>
         <p:nvGrpSpPr>
-          <p:cNvPr id="234" name="Google Shape;234;p17"/>
+          <p:cNvPr id="234" name="Google Shape;234;p17">
+            <a:extLst>
+              <a:ext uri="{FF2B5EF4-FFF2-40B4-BE49-F238E27FC236}">
+                <a16:creationId xmlns:a16="http://schemas.microsoft.com/office/drawing/2014/main" id="{291DF91E-DCB5-CC55-A2D8-5AC5C03C7F2D}"/>
+              </a:ext>
+            </a:extLst>
+          </p:cNvPr>
           <p:cNvGrpSpPr/>
           <p:nvPr/>
         </p:nvGrpSpPr>
         <p:grpSpPr>
           <a:xfrm>
-            <a:off x="266700" y="3028950"/>
+            <a:off x="281742" y="1216198"/>
             <a:ext cx="8553450" cy="1600275"/>
             <a:chOff x="266700" y="3028950"/>
             <a:chExt cx="8553450" cy="1600275"/>
@@ -14107,7 +15020,13 @@
         </p:grpSpPr>
         <p:sp>
           <p:nvSpPr>
-            <p:cNvPr id="235" name="Google Shape;235;p17"/>
+            <p:cNvPr id="235" name="Google Shape;235;p17">
+              <a:extLst>
+                <a:ext uri="{FF2B5EF4-FFF2-40B4-BE49-F238E27FC236}">
+                  <a16:creationId xmlns:a16="http://schemas.microsoft.com/office/drawing/2014/main" id="{FB86A20D-E871-C0FB-1B14-DCE4A94D25B2}"/>
+                </a:ext>
+              </a:extLst>
+            </p:cNvPr>
             <p:cNvSpPr/>
             <p:nvPr/>
           </p:nvSpPr>
@@ -14143,12 +15062,19 @@
                 </a:spcAft>
                 <a:buNone/>
               </a:pPr>
+              <a:endParaRPr sz="1600"/>
             </a:p>
           </p:txBody>
         </p:sp>
         <p:sp>
           <p:nvSpPr>
-            <p:cNvPr id="236" name="Google Shape;236;p17"/>
+            <p:cNvPr id="236" name="Google Shape;236;p17">
+              <a:extLst>
+                <a:ext uri="{FF2B5EF4-FFF2-40B4-BE49-F238E27FC236}">
+                  <a16:creationId xmlns:a16="http://schemas.microsoft.com/office/drawing/2014/main" id="{7B7078AC-BCFB-0478-BFD1-8E579DDA0F12}"/>
+                </a:ext>
+              </a:extLst>
+            </p:cNvPr>
             <p:cNvSpPr/>
             <p:nvPr/>
           </p:nvSpPr>
@@ -14190,12 +15116,19 @@
                 </a:spcAft>
                 <a:buNone/>
               </a:pPr>
+              <a:endParaRPr sz="1600"/>
             </a:p>
           </p:txBody>
         </p:sp>
         <p:grpSp>
           <p:nvGrpSpPr>
-            <p:cNvPr id="237" name="Google Shape;237;p17"/>
+            <p:cNvPr id="237" name="Google Shape;237;p17">
+              <a:extLst>
+                <a:ext uri="{FF2B5EF4-FFF2-40B4-BE49-F238E27FC236}">
+                  <a16:creationId xmlns:a16="http://schemas.microsoft.com/office/drawing/2014/main" id="{4BDEE2FA-D2B0-988B-592C-BDDE3F01F3B3}"/>
+                </a:ext>
+              </a:extLst>
+            </p:cNvPr>
             <p:cNvGrpSpPr/>
             <p:nvPr/>
           </p:nvGrpSpPr>
@@ -14209,7 +15142,13 @@
           </p:grpSpPr>
           <p:sp>
             <p:nvSpPr>
-              <p:cNvPr id="238" name="Google Shape;238;p17"/>
+              <p:cNvPr id="238" name="Google Shape;238;p17">
+                <a:extLst>
+                  <a:ext uri="{FF2B5EF4-FFF2-40B4-BE49-F238E27FC236}">
+                    <a16:creationId xmlns:a16="http://schemas.microsoft.com/office/drawing/2014/main" id="{A0D4D73A-75D0-DC0B-246F-5B4CE791A832}"/>
+                  </a:ext>
+                </a:extLst>
+              </p:cNvPr>
               <p:cNvSpPr/>
               <p:nvPr/>
             </p:nvSpPr>
@@ -14282,12 +15221,19 @@
                   </a:spcAft>
                   <a:buNone/>
                 </a:pPr>
+                <a:endParaRPr sz="1600"/>
               </a:p>
             </p:txBody>
           </p:sp>
           <p:sp>
             <p:nvSpPr>
-              <p:cNvPr id="239" name="Google Shape;239;p17"/>
+              <p:cNvPr id="239" name="Google Shape;239;p17">
+                <a:extLst>
+                  <a:ext uri="{FF2B5EF4-FFF2-40B4-BE49-F238E27FC236}">
+                    <a16:creationId xmlns:a16="http://schemas.microsoft.com/office/drawing/2014/main" id="{A13F4FF9-B406-BB02-E828-B0D40CBCE014}"/>
+                  </a:ext>
+                </a:extLst>
+              </p:cNvPr>
               <p:cNvSpPr/>
               <p:nvPr/>
             </p:nvSpPr>
@@ -14366,20 +15312,27 @@
                   </a:spcAft>
                   <a:buNone/>
                 </a:pPr>
+                <a:endParaRPr sz="1600"/>
               </a:p>
             </p:txBody>
           </p:sp>
         </p:grpSp>
         <p:sp>
           <p:nvSpPr>
-            <p:cNvPr id="240" name="Google Shape;240;p17"/>
+            <p:cNvPr id="240" name="Google Shape;240;p17">
+              <a:extLst>
+                <a:ext uri="{FF2B5EF4-FFF2-40B4-BE49-F238E27FC236}">
+                  <a16:creationId xmlns:a16="http://schemas.microsoft.com/office/drawing/2014/main" id="{2855708B-DD16-8891-AAA8-568BE671ECBA}"/>
+                </a:ext>
+              </a:extLst>
+            </p:cNvPr>
             <p:cNvSpPr txBox="1"/>
             <p:nvPr/>
           </p:nvSpPr>
           <p:spPr>
             <a:xfrm>
-              <a:off x="904875" y="3286125"/>
-              <a:ext cx="7667700" cy="1190700"/>
+              <a:off x="895440" y="3389358"/>
+              <a:ext cx="7667700" cy="899901"/>
             </a:xfrm>
             <a:prstGeom prst="rect">
               <a:avLst/>
@@ -14397,7 +15350,7 @@
             <a:p>
               <a:pPr marL="0" lvl="0" indent="0" algn="l" rtl="0">
                 <a:spcBef>
-                  <a:spcPts val="0"/>
+                  <a:spcPts val="450"/>
                 </a:spcBef>
                 <a:spcAft>
                   <a:spcPts val="0"/>
@@ -14405,39 +15358,7 @@
                 <a:buNone/>
               </a:pPr>
               <a:r>
-                <a:rPr lang="en-GB" sz="1500" b="1">
-                  <a:solidFill>
-                    <a:srgbClr val="111111"/>
-                  </a:solidFill>
-                  <a:latin typeface="Space Grotesk"/>
-                  <a:ea typeface="Space Grotesk"/>
-                  <a:cs typeface="Space Grotesk"/>
-                  <a:sym typeface="Space Grotesk"/>
-                </a:rPr>
-                <a:t>RULE OF THUMB</a:t>
-              </a:r>
-              <a:endParaRPr sz="1500" b="1">
-                <a:solidFill>
-                  <a:srgbClr val="111111"/>
-                </a:solidFill>
-                <a:latin typeface="Space Grotesk"/>
-                <a:ea typeface="Space Grotesk"/>
-                <a:cs typeface="Space Grotesk"/>
-                <a:sym typeface="Space Grotesk"/>
-              </a:endParaRPr>
-            </a:p>
-            <a:p>
-              <a:pPr marL="0" lvl="0" indent="0" algn="l" rtl="0">
-                <a:spcBef>
-                  <a:spcPts val="450"/>
-                </a:spcBef>
-                <a:spcAft>
-                  <a:spcPts val="0"/>
-                </a:spcAft>
-                <a:buNone/>
-              </a:pPr>
-              <a:r>
-                <a:rPr lang="en-GB" sz="1125" b="0">
+                <a:rPr lang="en-GB" sz="2400" b="0" dirty="0">
                   <a:solidFill>
                     <a:srgbClr val="111111"/>
                   </a:solidFill>
@@ -14449,7 +15370,7 @@
                 <a:t>Use the </a:t>
               </a:r>
               <a:r>
-                <a:rPr lang="en-GB" sz="1125" b="1">
+                <a:rPr lang="en-GB" sz="2400" b="1" dirty="0">
                   <a:solidFill>
                     <a:srgbClr val="111111"/>
                   </a:solidFill>
@@ -14461,7 +15382,7 @@
                 <a:t>Mean</a:t>
               </a:r>
               <a:r>
-                <a:rPr lang="en-GB" sz="1125" b="0">
+                <a:rPr lang="en-GB" sz="2400" b="0" dirty="0">
                   <a:solidFill>
                     <a:srgbClr val="111111"/>
                   </a:solidFill>
@@ -14470,10 +15391,394 @@
                   <a:cs typeface="Outfit Medium"/>
                   <a:sym typeface="Outfit Medium"/>
                 </a:rPr>
-                <a:t> when data is symmetrical and lacks extreme outliers. Use the </a:t>
+                <a:t> when data is symmetrical and lacks extreme outliers. </a:t>
+              </a:r>
+              <a:endParaRPr sz="2400" b="0" dirty="0">
+                <a:solidFill>
+                  <a:srgbClr val="111111"/>
+                </a:solidFill>
+                <a:latin typeface="Outfit Medium"/>
+                <a:ea typeface="Outfit Medium"/>
+                <a:cs typeface="Outfit Medium"/>
+                <a:sym typeface="Outfit Medium"/>
+              </a:endParaRPr>
+            </a:p>
+          </p:txBody>
+        </p:sp>
+      </p:grpSp>
+      <p:grpSp>
+        <p:nvGrpSpPr>
+          <p:cNvPr id="3" name="Google Shape;234;p17">
+            <a:extLst>
+              <a:ext uri="{FF2B5EF4-FFF2-40B4-BE49-F238E27FC236}">
+                <a16:creationId xmlns:a16="http://schemas.microsoft.com/office/drawing/2014/main" id="{A3D94CA0-0AFC-0262-4C01-51F397DB2ACE}"/>
+              </a:ext>
+            </a:extLst>
+          </p:cNvPr>
+          <p:cNvGrpSpPr/>
+          <p:nvPr/>
+        </p:nvGrpSpPr>
+        <p:grpSpPr>
+          <a:xfrm>
+            <a:off x="323850" y="3040447"/>
+            <a:ext cx="8553450" cy="1600275"/>
+            <a:chOff x="266700" y="3028950"/>
+            <a:chExt cx="8553450" cy="1600275"/>
+          </a:xfrm>
+        </p:grpSpPr>
+        <p:sp>
+          <p:nvSpPr>
+            <p:cNvPr id="4" name="Google Shape;235;p17">
+              <a:extLst>
+                <a:ext uri="{FF2B5EF4-FFF2-40B4-BE49-F238E27FC236}">
+                  <a16:creationId xmlns:a16="http://schemas.microsoft.com/office/drawing/2014/main" id="{BF732553-5774-BD4B-81F9-47B0E3EF4ACB}"/>
+                </a:ext>
+              </a:extLst>
+            </p:cNvPr>
+            <p:cNvSpPr/>
+            <p:nvPr/>
+          </p:nvSpPr>
+          <p:spPr>
+            <a:xfrm>
+              <a:off x="438150" y="3248025"/>
+              <a:ext cx="8382000" cy="1381200"/>
+            </a:xfrm>
+            <a:prstGeom prst="roundRect">
+              <a:avLst>
+                <a:gd name="adj" fmla="val 11034"/>
+              </a:avLst>
+            </a:prstGeom>
+            <a:solidFill>
+              <a:srgbClr val="111111"/>
+            </a:solidFill>
+            <a:ln>
+              <a:noFill/>
+            </a:ln>
+          </p:spPr>
+          <p:txBody>
+            <a:bodyPr spcFirstLastPara="1" wrap="square" lIns="0" tIns="0" rIns="0" bIns="0" anchor="ctr" anchorCtr="0">
+              <a:noAutofit/>
+            </a:bodyPr>
+            <a:lstStyle/>
+            <a:p>
+              <a:pPr marL="0" lvl="0" indent="0" algn="l" rtl="0">
+                <a:spcBef>
+                  <a:spcPts val="0"/>
+                </a:spcBef>
+                <a:spcAft>
+                  <a:spcPts val="0"/>
+                </a:spcAft>
+                <a:buNone/>
+              </a:pPr>
+              <a:endParaRPr sz="1600"/>
+            </a:p>
+          </p:txBody>
+        </p:sp>
+        <p:sp>
+          <p:nvSpPr>
+            <p:cNvPr id="5" name="Google Shape;236;p17">
+              <a:extLst>
+                <a:ext uri="{FF2B5EF4-FFF2-40B4-BE49-F238E27FC236}">
+                  <a16:creationId xmlns:a16="http://schemas.microsoft.com/office/drawing/2014/main" id="{ECEA0A25-7E77-7600-6D46-66DF4F7A3CCF}"/>
+                </a:ext>
+              </a:extLst>
+            </p:cNvPr>
+            <p:cNvSpPr/>
+            <p:nvPr/>
+          </p:nvSpPr>
+          <p:spPr>
+            <a:xfrm>
+              <a:off x="381000" y="3190875"/>
+              <a:ext cx="8382000" cy="1381200"/>
+            </a:xfrm>
+            <a:prstGeom prst="roundRect">
+              <a:avLst>
+                <a:gd name="adj" fmla="val 11034"/>
+              </a:avLst>
+            </a:prstGeom>
+            <a:solidFill>
+              <a:srgbClr val="FFDE59"/>
+            </a:solidFill>
+            <a:ln w="38100" cap="flat" cmpd="sng">
+              <a:solidFill>
+                <a:srgbClr val="111111"/>
+              </a:solidFill>
+              <a:prstDash val="solid"/>
+              <a:round/>
+              <a:headEnd type="none" w="sm" len="sm"/>
+              <a:tailEnd type="none" w="sm" len="sm"/>
+            </a:ln>
+          </p:spPr>
+          <p:txBody>
+            <a:bodyPr spcFirstLastPara="1" wrap="square" lIns="0" tIns="0" rIns="0" bIns="0" anchor="ctr" anchorCtr="0">
+              <a:noAutofit/>
+            </a:bodyPr>
+            <a:lstStyle/>
+            <a:p>
+              <a:pPr marL="0" lvl="0" indent="0" algn="l" rtl="0">
+                <a:spcBef>
+                  <a:spcPts val="0"/>
+                </a:spcBef>
+                <a:spcAft>
+                  <a:spcPts val="0"/>
+                </a:spcAft>
+                <a:buNone/>
+              </a:pPr>
+              <a:endParaRPr sz="1800"/>
+            </a:p>
+          </p:txBody>
+        </p:sp>
+        <p:grpSp>
+          <p:nvGrpSpPr>
+            <p:cNvPr id="6" name="Google Shape;237;p17">
+              <a:extLst>
+                <a:ext uri="{FF2B5EF4-FFF2-40B4-BE49-F238E27FC236}">
+                  <a16:creationId xmlns:a16="http://schemas.microsoft.com/office/drawing/2014/main" id="{4463EA95-4918-333C-8AE4-EED7ADE4EA67}"/>
+                </a:ext>
+              </a:extLst>
+            </p:cNvPr>
+            <p:cNvGrpSpPr/>
+            <p:nvPr/>
+          </p:nvGrpSpPr>
+          <p:grpSpPr>
+            <a:xfrm>
+              <a:off x="266700" y="3028950"/>
+              <a:ext cx="548730" cy="520110"/>
+              <a:chOff x="47625" y="47625"/>
+              <a:chExt cx="914550" cy="866850"/>
+            </a:xfrm>
+          </p:grpSpPr>
+          <p:sp>
+            <p:nvSpPr>
+              <p:cNvPr id="8" name="Google Shape;238;p17">
+                <a:extLst>
+                  <a:ext uri="{FF2B5EF4-FFF2-40B4-BE49-F238E27FC236}">
+                    <a16:creationId xmlns:a16="http://schemas.microsoft.com/office/drawing/2014/main" id="{FC45377F-B6A0-53D5-B73A-7367B4A80B38}"/>
+                  </a:ext>
+                </a:extLst>
+              </p:cNvPr>
+              <p:cNvSpPr/>
+              <p:nvPr/>
+            </p:nvSpPr>
+            <p:spPr>
+              <a:xfrm>
+                <a:off x="104775" y="104775"/>
+                <a:ext cx="857400" cy="809700"/>
+              </a:xfrm>
+              <a:custGeom>
+                <a:avLst/>
+                <a:gdLst/>
+                <a:ahLst/>
+                <a:cxnLst/>
+                <a:rect l="l" t="t" r="r" b="b"/>
+                <a:pathLst>
+                  <a:path w="120000" h="120000" extrusionOk="0">
+                    <a:moveTo>
+                      <a:pt x="60000" y="0"/>
+                    </a:moveTo>
+                    <a:lnTo>
+                      <a:pt x="73333" y="42353"/>
+                    </a:lnTo>
+                    <a:lnTo>
+                      <a:pt x="120000" y="42353"/>
+                    </a:lnTo>
+                    <a:lnTo>
+                      <a:pt x="86667" y="70588"/>
+                    </a:lnTo>
+                    <a:lnTo>
+                      <a:pt x="100000" y="120000"/>
+                    </a:lnTo>
+                    <a:lnTo>
+                      <a:pt x="60000" y="91765"/>
+                    </a:lnTo>
+                    <a:lnTo>
+                      <a:pt x="20000" y="120000"/>
+                    </a:lnTo>
+                    <a:lnTo>
+                      <a:pt x="33333" y="70588"/>
+                    </a:lnTo>
+                    <a:lnTo>
+                      <a:pt x="0" y="42353"/>
+                    </a:lnTo>
+                    <a:lnTo>
+                      <a:pt x="46667" y="42353"/>
+                    </a:lnTo>
+                    <a:close/>
+                  </a:path>
+                </a:pathLst>
+              </a:custGeom>
+              <a:solidFill>
+                <a:srgbClr val="111111"/>
+              </a:solidFill>
+              <a:ln>
+                <a:noFill/>
+              </a:ln>
+            </p:spPr>
+            <p:txBody>
+              <a:bodyPr spcFirstLastPara="1" wrap="square" lIns="0" tIns="0" rIns="0" bIns="0" anchor="ctr" anchorCtr="0">
+                <a:noAutofit/>
+              </a:bodyPr>
+              <a:lstStyle/>
+              <a:p>
+                <a:pPr marL="0" lvl="0" indent="0" algn="l" rtl="0">
+                  <a:spcBef>
+                    <a:spcPts val="0"/>
+                  </a:spcBef>
+                  <a:spcAft>
+                    <a:spcPts val="0"/>
+                  </a:spcAft>
+                  <a:buNone/>
+                </a:pPr>
+                <a:endParaRPr sz="1600"/>
+              </a:p>
+            </p:txBody>
+          </p:sp>
+          <p:sp>
+            <p:nvSpPr>
+              <p:cNvPr id="9" name="Google Shape;239;p17">
+                <a:extLst>
+                  <a:ext uri="{FF2B5EF4-FFF2-40B4-BE49-F238E27FC236}">
+                    <a16:creationId xmlns:a16="http://schemas.microsoft.com/office/drawing/2014/main" id="{FCD142DA-1EBF-9BCB-75D7-4DA2958F8203}"/>
+                  </a:ext>
+                </a:extLst>
+              </p:cNvPr>
+              <p:cNvSpPr/>
+              <p:nvPr/>
+            </p:nvSpPr>
+            <p:spPr>
+              <a:xfrm>
+                <a:off x="47625" y="47625"/>
+                <a:ext cx="857400" cy="809700"/>
+              </a:xfrm>
+              <a:custGeom>
+                <a:avLst/>
+                <a:gdLst/>
+                <a:ahLst/>
+                <a:cxnLst/>
+                <a:rect l="l" t="t" r="r" b="b"/>
+                <a:pathLst>
+                  <a:path w="120000" h="120000" extrusionOk="0">
+                    <a:moveTo>
+                      <a:pt x="60000" y="0"/>
+                    </a:moveTo>
+                    <a:lnTo>
+                      <a:pt x="73333" y="42353"/>
+                    </a:lnTo>
+                    <a:lnTo>
+                      <a:pt x="120000" y="42353"/>
+                    </a:lnTo>
+                    <a:lnTo>
+                      <a:pt x="86667" y="70588"/>
+                    </a:lnTo>
+                    <a:lnTo>
+                      <a:pt x="100000" y="120000"/>
+                    </a:lnTo>
+                    <a:lnTo>
+                      <a:pt x="60000" y="91765"/>
+                    </a:lnTo>
+                    <a:lnTo>
+                      <a:pt x="20000" y="120000"/>
+                    </a:lnTo>
+                    <a:lnTo>
+                      <a:pt x="33333" y="70588"/>
+                    </a:lnTo>
+                    <a:lnTo>
+                      <a:pt x="0" y="42353"/>
+                    </a:lnTo>
+                    <a:lnTo>
+                      <a:pt x="46667" y="42353"/>
+                    </a:lnTo>
+                    <a:close/>
+                  </a:path>
+                </a:pathLst>
+              </a:custGeom>
+              <a:solidFill>
+                <a:srgbClr val="FFDE59"/>
+              </a:solidFill>
+              <a:ln w="38100" cap="flat" cmpd="sng">
+                <a:solidFill>
+                  <a:srgbClr val="111111"/>
+                </a:solidFill>
+                <a:prstDash val="solid"/>
+                <a:round/>
+                <a:headEnd type="none" w="sm" len="sm"/>
+                <a:tailEnd type="none" w="sm" len="sm"/>
+              </a:ln>
+            </p:spPr>
+            <p:txBody>
+              <a:bodyPr spcFirstLastPara="1" wrap="square" lIns="0" tIns="0" rIns="0" bIns="0" anchor="ctr" anchorCtr="0">
+                <a:noAutofit/>
+              </a:bodyPr>
+              <a:lstStyle/>
+              <a:p>
+                <a:pPr marL="0" lvl="0" indent="0" algn="l" rtl="0">
+                  <a:spcBef>
+                    <a:spcPts val="0"/>
+                  </a:spcBef>
+                  <a:spcAft>
+                    <a:spcPts val="0"/>
+                  </a:spcAft>
+                  <a:buNone/>
+                </a:pPr>
+                <a:endParaRPr sz="1600"/>
+              </a:p>
+            </p:txBody>
+          </p:sp>
+        </p:grpSp>
+        <p:sp>
+          <p:nvSpPr>
+            <p:cNvPr id="7" name="Google Shape;240;p17">
+              <a:extLst>
+                <a:ext uri="{FF2B5EF4-FFF2-40B4-BE49-F238E27FC236}">
+                  <a16:creationId xmlns:a16="http://schemas.microsoft.com/office/drawing/2014/main" id="{1B5398BC-9E55-79B2-B486-85A596C927B0}"/>
+                </a:ext>
+              </a:extLst>
+            </p:cNvPr>
+            <p:cNvSpPr txBox="1"/>
+            <p:nvPr/>
+          </p:nvSpPr>
+          <p:spPr>
+            <a:xfrm>
+              <a:off x="838290" y="3410418"/>
+              <a:ext cx="7667700" cy="970492"/>
+            </a:xfrm>
+            <a:prstGeom prst="rect">
+              <a:avLst/>
+            </a:prstGeom>
+            <a:noFill/>
+            <a:ln>
+              <a:noFill/>
+            </a:ln>
+          </p:spPr>
+          <p:txBody>
+            <a:bodyPr spcFirstLastPara="1" wrap="square" lIns="0" tIns="0" rIns="0" bIns="0" anchor="ctr" anchorCtr="0">
+              <a:noAutofit/>
+            </a:bodyPr>
+            <a:lstStyle/>
+            <a:p>
+              <a:pPr marL="0" lvl="0" indent="0" algn="l" rtl="0">
+                <a:spcBef>
+                  <a:spcPts val="450"/>
+                </a:spcBef>
+                <a:spcAft>
+                  <a:spcPts val="0"/>
+                </a:spcAft>
+                <a:buNone/>
+              </a:pPr>
+              <a:r>
+                <a:rPr lang="en-GB" sz="2400" b="0" dirty="0">
+                  <a:solidFill>
+                    <a:srgbClr val="111111"/>
+                  </a:solidFill>
+                  <a:latin typeface="Outfit Medium"/>
+                  <a:ea typeface="Outfit Medium"/>
+                  <a:cs typeface="Outfit Medium"/>
+                  <a:sym typeface="Outfit Medium"/>
+                </a:rPr>
+                <a:t>Use the </a:t>
               </a:r>
               <a:r>
-                <a:rPr lang="en-GB" sz="1125" b="1">
+                <a:rPr lang="en-GB" sz="2400" b="1" dirty="0">
                   <a:solidFill>
                     <a:srgbClr val="111111"/>
                   </a:solidFill>
@@ -14485,7 +15790,7 @@
                 <a:t>Median</a:t>
               </a:r>
               <a:r>
-                <a:rPr lang="en-GB" sz="1125" b="0">
+                <a:rPr lang="en-GB" sz="2400" b="0" dirty="0">
                   <a:solidFill>
                     <a:srgbClr val="111111"/>
                   </a:solidFill>
@@ -14496,7 +15801,7 @@
                 </a:rPr>
                 <a:t> when data is skewed or contains extreme outliers, such as income, real estate, or pocket money.</a:t>
               </a:r>
-              <a:endParaRPr sz="1125" b="0">
+              <a:endParaRPr sz="2400" b="0" dirty="0">
                 <a:solidFill>
                   <a:srgbClr val="111111"/>
                 </a:solidFill>
@@ -14510,6 +15815,11 @@
         </p:sp>
       </p:grpSp>
     </p:spTree>
+    <p:extLst>
+      <p:ext uri="{BB962C8B-B14F-4D97-AF65-F5344CB8AC3E}">
+        <p14:creationId xmlns:p14="http://schemas.microsoft.com/office/powerpoint/2010/main" val="1194019834"/>
+      </p:ext>
+    </p:extLst>
   </p:cSld>
   <p:clrMapOvr>
     <a:masterClrMapping/>
@@ -14548,7 +15858,7 @@
                                           </p:stCondLst>
                                         </p:cTn>
                                         <p:tgtEl>
-                                          <p:spTgt spid="230"/>
+                                          <p:spTgt spid="234"/>
                                         </p:tgtEl>
                                         <p:attrNameLst>
                                           <p:attrName>style.visibility</p:attrName>
@@ -14593,7 +15903,7 @@
                                           </p:stCondLst>
                                         </p:cTn>
                                         <p:tgtEl>
-                                          <p:spTgt spid="234"/>
+                                          <p:spTgt spid="3"/>
                                         </p:tgtEl>
                                         <p:attrNameLst>
                                           <p:attrName>style.visibility</p:attrName>
@@ -14913,6 +16223,8 @@
       </a:bgFillStyleLst>
     </a:fmtScheme>
   </a:themeElements>
+  <a:objectDefaults/>
+  <a:extraClrSchemeLst/>
   <a:extLst>
     <a:ext uri="{05A4C25C-085E-4340-85A3-A5531E510DB2}">
       <thm15:themeFamily xmlns:thm15="http://schemas.microsoft.com/office/thememl/2012/main" name="Office Theme" id="{62F939B6-93AF-4DB8-9C6B-D6C7DFDC589F}" vid="{4A3C46E8-61CC-4603-A589-7422A47A8E4A}"/>
@@ -15197,6 +16509,8 @@
       </a:bgFillStyleLst>
     </a:fmtScheme>
   </a:themeElements>
+  <a:objectDefaults/>
+  <a:extraClrSchemeLst/>
   <a:extLst>
     <a:ext uri="{05A4C25C-085E-4340-85A3-A5531E510DB2}">
       <thm15:themeFamily xmlns:thm15="http://schemas.microsoft.com/office/thememl/2012/main" name="Office Theme" id="{62F939B6-93AF-4DB8-9C6B-D6C7DFDC589F}" vid="{4A3C46E8-61CC-4603-A589-7422A47A8E4A}"/>
